--- a/presentation/rock-demo.pptx
+++ b/presentation/rock-demo.pptx
@@ -20,7 +20,6 @@
     <p:sldId id="265" r:id="rId13"/>
     <p:sldId id="266" r:id="rId14"/>
     <p:sldId id="267" r:id="rId15"/>
-    <p:sldId id="268" r:id="rId16"/>
   </p:sldIdLst>
   <p:sldSz cx="10080625" cy="5670550"/>
   <p:notesSz cx="7559675" cy="10691813"/>
@@ -304,7 +303,7 @@
             <a:pPr algn="r">
               <a:buNone/>
             </a:pPr>
-            <a:fld id="{F9878376-8D23-41B5-84EE-C0E2FB564FD6}" type="slidenum">
+            <a:fld id="{F71B1821-B5B7-4945-BDC7-44BBF98C79A0}" type="slidenum">
               <a:rPr b="0" lang="en-US" sz="1400" spc="-1" strike="noStrike">
                 <a:latin typeface="Times New Roman"/>
               </a:rPr>
@@ -341,7 +340,7 @@
       </p:grpSpPr>
       <p:sp>
         <p:nvSpPr>
-          <p:cNvPr id="79" name="PlaceHolder 1"/>
+          <p:cNvPr id="76" name="PlaceHolder 1"/>
           <p:cNvSpPr>
             <a:spLocks noGrp="1"/>
           </p:cNvSpPr>
@@ -364,7 +363,7 @@
       </p:sp>
       <p:sp>
         <p:nvSpPr>
-          <p:cNvPr id="80" name="PlaceHolder 2"/>
+          <p:cNvPr id="77" name="PlaceHolder 2"/>
           <p:cNvSpPr>
             <a:spLocks noGrp="1"/>
           </p:cNvSpPr>
@@ -426,7 +425,7 @@
       </p:grpSpPr>
       <p:sp>
         <p:nvSpPr>
-          <p:cNvPr id="97" name="PlaceHolder 1"/>
+          <p:cNvPr id="94" name="PlaceHolder 1"/>
           <p:cNvSpPr>
             <a:spLocks noGrp="1"/>
           </p:cNvSpPr>
@@ -449,7 +448,7 @@
       </p:sp>
       <p:sp>
         <p:nvSpPr>
-          <p:cNvPr id="98" name="PlaceHolder 2"/>
+          <p:cNvPr id="95" name="PlaceHolder 2"/>
           <p:cNvSpPr>
             <a:spLocks noGrp="1"/>
           </p:cNvSpPr>
@@ -479,7 +478,7 @@
               <a:rPr b="0" lang="en-US" sz="2000" spc="-1" strike="noStrike">
                 <a:latin typeface="Arial"/>
               </a:rPr>
-              <a:t>In the demo nothing is hacked: the fork is local. On-chain the three cases look identical; riskdep flags any upgrade, and the runbook says to check whether the new code is verified and announced, and to de-lever or exit until it is explained.</a:t>
+              <a:t>alt-pst-mint.sh 15000000: supply 213.9M → 228.9M PST. Admin.Mint is critical above 5 % of the supply in one transaction (watch.mint_share_critical); 10M (4.7 %) would stay silent.</a:t>
             </a:r>
             <a:endParaRPr b="0" lang="en-US" sz="2000" spc="-1" strike="noStrike">
               <a:latin typeface="Arial"/>
@@ -511,7 +510,7 @@
       </p:grpSpPr>
       <p:sp>
         <p:nvSpPr>
-          <p:cNvPr id="99" name="PlaceHolder 1"/>
+          <p:cNvPr id="96" name="PlaceHolder 1"/>
           <p:cNvSpPr>
             <a:spLocks noGrp="1"/>
           </p:cNvSpPr>
@@ -534,7 +533,7 @@
       </p:sp>
       <p:sp>
         <p:nvSpPr>
-          <p:cNvPr id="100" name="PlaceHolder 2"/>
+          <p:cNvPr id="97" name="PlaceHolder 2"/>
           <p:cNvSpPr>
             <a:spLocks noGrp="1"/>
           </p:cNvSpPr>
@@ -564,7 +563,7 @@
               <a:rPr b="0" lang="en-US" sz="2000" spc="-1" strike="noStrike">
                 <a:latin typeface="Arial"/>
               </a:rPr>
-              <a:t>alt-pst-mint.sh 15000000: supply 213.9M → 228.9M PST. Admin.Mint is critical above 5 % of the supply in one transaction (watch.mint_share_critical); 10M (4.7 %) would stay silent.</a:t>
+              <a:t>riskdep notify: alerts at warn and above, one message per block, no heartbeat. On a fork the Etherscan button is left out: the transaction is local.</a:t>
             </a:r>
             <a:endParaRPr b="0" lang="en-US" sz="2000" spc="-1" strike="noStrike">
               <a:latin typeface="Arial"/>
@@ -596,7 +595,7 @@
       </p:grpSpPr>
       <p:sp>
         <p:nvSpPr>
-          <p:cNvPr id="101" name="PlaceHolder 1"/>
+          <p:cNvPr id="98" name="PlaceHolder 1"/>
           <p:cNvSpPr>
             <a:spLocks noGrp="1"/>
           </p:cNvSpPr>
@@ -619,92 +618,7 @@
       </p:sp>
       <p:sp>
         <p:nvSpPr>
-          <p:cNvPr id="102" name="PlaceHolder 2"/>
-          <p:cNvSpPr>
-            <a:spLocks noGrp="1"/>
-          </p:cNvSpPr>
-          <p:nvPr>
-            <p:ph type="body"/>
-          </p:nvPr>
-        </p:nvSpPr>
-        <p:spPr>
-          <a:xfrm>
-            <a:off x="756000" y="5078520"/>
-            <a:ext cx="6047640" cy="4811040"/>
-          </a:xfrm>
-          <a:prstGeom prst="rect">
-            <a:avLst/>
-          </a:prstGeom>
-          <a:noFill/>
-          <a:ln w="0">
-            <a:noFill/>
-          </a:ln>
-        </p:spPr>
-        <p:txBody>
-          <a:bodyPr lIns="0" rIns="0" tIns="0" bIns="0" anchor="t">
-            <a:noAutofit/>
-          </a:bodyPr>
-          <a:p>
-            <a:r>
-              <a:rPr b="0" lang="en-US" sz="2000" spc="-1" strike="noStrike">
-                <a:latin typeface="Arial"/>
-              </a:rPr>
-              <a:t>riskdep notify: only alerts at warn and above, no heartbeat; standing findings once per 1800 blocks; criticals with sound.</a:t>
-            </a:r>
-            <a:endParaRPr b="0" lang="en-US" sz="2000" spc="-1" strike="noStrike">
-              <a:latin typeface="Arial"/>
-            </a:endParaRPr>
-          </a:p>
-        </p:txBody>
-      </p:sp>
-    </p:spTree>
-  </p:cSld>
-</p:notes>
-</file>
-
-<file path=ppt/notesSlides/notesSlide13.xml><?xml version="1.0" encoding="utf-8"?>
-<p:notes xmlns:a="http://schemas.openxmlformats.org/drawingml/2006/main" xmlns:p="http://schemas.openxmlformats.org/presentationml/2006/main" xmlns:r="http://schemas.openxmlformats.org/officeDocument/2006/relationships" xmlns:p14="http://schemas.microsoft.com/office/powerpoint/2010/main" xmlns:p15="http://schemas.microsoft.com/office/powerpoint/2012/main" xmlns:mc="http://schemas.openxmlformats.org/markup-compatibility/2006">
-  <p:cSld>
-    <p:spTree>
-      <p:nvGrpSpPr>
-        <p:cNvPr id="1" name=""/>
-        <p:cNvGrpSpPr/>
-        <p:nvPr/>
-      </p:nvGrpSpPr>
-      <p:grpSpPr>
-        <a:xfrm>
-          <a:off x="0" y="0"/>
-          <a:ext cx="0" cy="0"/>
-          <a:chOff x="0" y="0"/>
-          <a:chExt cx="0" cy="0"/>
-        </a:xfrm>
-      </p:grpSpPr>
-      <p:sp>
-        <p:nvSpPr>
-          <p:cNvPr id="103" name="PlaceHolder 1"/>
-          <p:cNvSpPr>
-            <a:spLocks noGrp="1"/>
-          </p:cNvSpPr>
-          <p:nvPr>
-            <p:ph type="sldImg"/>
-          </p:nvPr>
-        </p:nvSpPr>
-        <p:spPr>
-          <a:xfrm>
-            <a:off x="216000" y="812520"/>
-            <a:ext cx="7127280" cy="4008960"/>
-          </a:xfrm>
-          <a:prstGeom prst="rect">
-            <a:avLst/>
-          </a:prstGeom>
-          <a:ln w="0">
-            <a:noFill/>
-          </a:ln>
-        </p:spPr>
-      </p:sp>
-      <p:sp>
-        <p:nvSpPr>
-          <p:cNvPr id="104" name="PlaceHolder 2"/>
+          <p:cNvPr id="99" name="PlaceHolder 2"/>
           <p:cNvSpPr>
             <a:spLocks noGrp="1"/>
           </p:cNvSpPr>
@@ -766,7 +680,7 @@
       </p:grpSpPr>
       <p:sp>
         <p:nvSpPr>
-          <p:cNvPr id="81" name="PlaceHolder 1"/>
+          <p:cNvPr id="78" name="PlaceHolder 1"/>
           <p:cNvSpPr>
             <a:spLocks noGrp="1"/>
           </p:cNvSpPr>
@@ -789,7 +703,7 @@
       </p:sp>
       <p:sp>
         <p:nvSpPr>
-          <p:cNvPr id="82" name="PlaceHolder 2"/>
+          <p:cNvPr id="79" name="PlaceHolder 2"/>
           <p:cNvSpPr>
             <a:spLocks noGrp="1"/>
           </p:cNvSpPr>
@@ -819,7 +733,7 @@
               <a:rPr b="0" lang="en-US" sz="2000" spc="-1" strike="noStrike">
                 <a:latin typeface="Arial"/>
               </a:rPr>
-              <a:t>The challenge brief (Belem Capital): identify a position's dependencies, estimate the impact when one fails, and help decide stay or exit despite execution costs.</a:t>
+              <a:t>The challenge brief (Belem Capital): 'the hard part is not noticing the incident. It is working out what it does to your book, and how fast.' The demo starts from known incidents and shows their impact and the decision.</a:t>
             </a:r>
             <a:endParaRPr b="0" lang="en-US" sz="2000" spc="-1" strike="noStrike">
               <a:latin typeface="Arial"/>
@@ -851,7 +765,7 @@
       </p:grpSpPr>
       <p:sp>
         <p:nvSpPr>
-          <p:cNvPr id="83" name="PlaceHolder 1"/>
+          <p:cNvPr id="80" name="PlaceHolder 1"/>
           <p:cNvSpPr>
             <a:spLocks noGrp="1"/>
           </p:cNvSpPr>
@@ -874,7 +788,7 @@
       </p:sp>
       <p:sp>
         <p:nvSpPr>
-          <p:cNvPr id="84" name="PlaceHolder 2"/>
+          <p:cNvPr id="81" name="PlaceHolder 2"/>
           <p:cNvSpPr>
             <a:spLocks noGrp="1"/>
           </p:cNvSpPr>
@@ -936,7 +850,7 @@
       </p:grpSpPr>
       <p:sp>
         <p:nvSpPr>
-          <p:cNvPr id="85" name="PlaceHolder 1"/>
+          <p:cNvPr id="82" name="PlaceHolder 1"/>
           <p:cNvSpPr>
             <a:spLocks noGrp="1"/>
           </p:cNvSpPr>
@@ -959,7 +873,7 @@
       </p:sp>
       <p:sp>
         <p:nvSpPr>
-          <p:cNvPr id="86" name="PlaceHolder 2"/>
+          <p:cNvPr id="83" name="PlaceHolder 2"/>
           <p:cNvSpPr>
             <a:spLocks noGrp="1"/>
           </p:cNvSpPr>
@@ -1021,7 +935,7 @@
       </p:grpSpPr>
       <p:sp>
         <p:nvSpPr>
-          <p:cNvPr id="87" name="PlaceHolder 1"/>
+          <p:cNvPr id="84" name="PlaceHolder 1"/>
           <p:cNvSpPr>
             <a:spLocks noGrp="1"/>
           </p:cNvSpPr>
@@ -1044,7 +958,7 @@
       </p:sp>
       <p:sp>
         <p:nvSpPr>
-          <p:cNvPr id="88" name="PlaceHolder 2"/>
+          <p:cNvPr id="85" name="PlaceHolder 2"/>
           <p:cNvSpPr>
             <a:spLocks noGrp="1"/>
           </p:cNvSpPr>
@@ -1074,7 +988,7 @@
               <a:rPr b="0" lang="en-US" sz="2000" spc="-1" strike="noStrike">
                 <a:latin typeface="Arial"/>
               </a:rPr>
-              <a:t>Levels: docs/alert-runbook.md (critical: money is being lost now, or can be lost in the next block; warn: the risk changed, a decision may be needed).</a:t>
+              <a:t>Levels: docs/reference/alert-runbook.md (critical: money is being lost now, or can be lost in the next block; warn: the risk changed, a decision may be needed).</a:t>
             </a:r>
             <a:endParaRPr b="0" lang="en-US" sz="2000" spc="-1" strike="noStrike">
               <a:latin typeface="Arial"/>
@@ -1106,7 +1020,7 @@
       </p:grpSpPr>
       <p:sp>
         <p:nvSpPr>
-          <p:cNvPr id="89" name="PlaceHolder 1"/>
+          <p:cNvPr id="86" name="PlaceHolder 1"/>
           <p:cNvSpPr>
             <a:spLocks noGrp="1"/>
           </p:cNvSpPr>
@@ -1129,7 +1043,7 @@
       </p:sp>
       <p:sp>
         <p:nvSpPr>
-          <p:cNvPr id="90" name="PlaceHolder 2"/>
+          <p:cNvPr id="87" name="PlaceHolder 2"/>
           <p:cNvSpPr>
             <a:spLocks noGrp="1"/>
           </p:cNvSpPr>
@@ -1159,7 +1073,7 @@
               <a:rPr b="0" lang="en-US" sz="2000" spc="-1" strike="noStrike">
                 <a:latin typeface="Arial"/>
               </a:rPr>
-              <a:t>Command: analyze --book examples/rockawayx-ethereum.json --shock token=strUSD:0.32. Same −32 % as act 2 causes, so the forecast comes before the event.</a:t>
+              <a:t>alt-redstone.sh: oracle 1.0300 → 0.7001. UnrealisedBadDebt: 1,902,392 USDC, the vault's share 1,236,933 (9.09 % of the vault).</a:t>
             </a:r>
             <a:endParaRPr b="0" lang="en-US" sz="2000" spc="-1" strike="noStrike">
               <a:latin typeface="Arial"/>
@@ -1191,7 +1105,7 @@
       </p:grpSpPr>
       <p:sp>
         <p:nvSpPr>
-          <p:cNvPr id="91" name="PlaceHolder 1"/>
+          <p:cNvPr id="88" name="PlaceHolder 1"/>
           <p:cNvSpPr>
             <a:spLocks noGrp="1"/>
           </p:cNvSpPr>
@@ -1214,7 +1128,7 @@
       </p:sp>
       <p:sp>
         <p:nvSpPr>
-          <p:cNvPr id="92" name="PlaceHolder 2"/>
+          <p:cNvPr id="89" name="PlaceHolder 2"/>
           <p:cNvSpPr>
             <a:spLocks noGrp="1"/>
           </p:cNvSpPr>
@@ -1244,7 +1158,7 @@
               <a:rPr b="0" lang="en-US" sz="2000" spc="-1" strike="noStrike">
                 <a:latin typeface="Arial"/>
               </a:rPr>
-              <a:t>alt-redstone.sh: oracle 1.0300 → 0.7001. UnrealisedBadDebt: 1,902,392 USDC, the vault's share 1,236,933 (9.09 % of the vault).</a:t>
+              <a:t>All six at block 26,165,574, the block after the upgrade. On Telegram: one message, the cause first, the loss and the EXIT decision on top, the six alerts folded underneath.</a:t>
             </a:r>
             <a:endParaRPr b="0" lang="en-US" sz="2000" spc="-1" strike="noStrike">
               <a:latin typeface="Arial"/>
@@ -1276,7 +1190,7 @@
       </p:grpSpPr>
       <p:sp>
         <p:nvSpPr>
-          <p:cNvPr id="93" name="PlaceHolder 1"/>
+          <p:cNvPr id="90" name="PlaceHolder 1"/>
           <p:cNvSpPr>
             <a:spLocks noGrp="1"/>
           </p:cNvSpPr>
@@ -1299,7 +1213,7 @@
       </p:sp>
       <p:sp>
         <p:nvSpPr>
-          <p:cNvPr id="94" name="PlaceHolder 2"/>
+          <p:cNvPr id="91" name="PlaceHolder 2"/>
           <p:cNvSpPr>
             <a:spLocks noGrp="1"/>
           </p:cNvSpPr>
@@ -1329,7 +1243,7 @@
               <a:rPr b="0" lang="en-US" sz="2000" spc="-1" strike="noStrike">
                 <a:latin typeface="Arial"/>
               </a:rPr>
-              <a:t>All six at block 26,165,574, the block after the upgrade. On Telegram: one summary (bad debt, exit queue, oracle move), the upgrade, and a second summary (divergence, impact).</a:t>
+              <a:t>Depositor followed: the vault's largest, 0xddcd…cdd1, 4,994,682 USDC (36.7 %). Figures from the OracleImpact alert. Leaving first moves part of the loss onto those who stay: that is why speed matters.</a:t>
             </a:r>
             <a:endParaRPr b="0" lang="en-US" sz="2000" spc="-1" strike="noStrike">
               <a:latin typeface="Arial"/>
@@ -1361,7 +1275,7 @@
       </p:grpSpPr>
       <p:sp>
         <p:nvSpPr>
-          <p:cNvPr id="95" name="PlaceHolder 1"/>
+          <p:cNvPr id="92" name="PlaceHolder 1"/>
           <p:cNvSpPr>
             <a:spLocks noGrp="1"/>
           </p:cNvSpPr>
@@ -1384,7 +1298,7 @@
       </p:sp>
       <p:sp>
         <p:nvSpPr>
-          <p:cNvPr id="96" name="PlaceHolder 2"/>
+          <p:cNvPr id="93" name="PlaceHolder 2"/>
           <p:cNvSpPr>
             <a:spLocks noGrp="1"/>
           </p:cNvSpPr>
@@ -1414,7 +1328,7 @@
               <a:rPr b="0" lang="en-US" sz="2000" spc="-1" strike="noStrike">
                 <a:latin typeface="Arial"/>
               </a:rPr>
-              <a:t>Depositor followed: the vault's largest, 0xddcd…cdd1, 4,994,682 USDC (36.7 %). Figures from the OracleImpact alert. Leaving first moves part of the loss onto those who stay: that is why speed matters.</a:t>
+              <a:t>In the demo nothing is hacked: the fork is local. On-chain the three cases look identical; riskdep flags any upgrade, and the runbook says to check whether the new code is verified and announced, and to de-lever or exit until it is explained.</a:t>
             </a:r>
             <a:endParaRPr b="0" lang="en-US" sz="2000" spc="-1" strike="noStrike">
               <a:latin typeface="Arial"/>
@@ -1478,7 +1392,7 @@
         <p:txBody>
           <a:bodyPr/>
           <a:p>
-            <a:fld id="{A6AE7A70-8C4E-43D3-9A37-73596BBA1C36}" type="slidenum">
+            <a:fld id="{4701EC51-981E-4C05-854C-6D82B495BB72}" type="slidenum">
               <a:t>&lt;#&gt;</a:t>
             </a:fld>
           </a:p>
@@ -1666,7 +1580,7 @@
         <p:txBody>
           <a:bodyPr/>
           <a:p>
-            <a:fld id="{CBCBB2FB-9C27-44E7-9327-185868D747DC}" type="slidenum">
+            <a:fld id="{32C6F4B8-5217-4BBE-A875-78A48C286BB4}" type="slidenum">
               <a:t>&lt;#&gt;</a:t>
             </a:fld>
           </a:p>
@@ -1922,7 +1836,7 @@
         <p:txBody>
           <a:bodyPr/>
           <a:p>
-            <a:fld id="{520F5DD1-7169-4B3A-B984-09E293E86F44}" type="slidenum">
+            <a:fld id="{5E32E043-D94E-4E92-B596-ACFB5D0D6802}" type="slidenum">
               <a:t>&lt;#&gt;</a:t>
             </a:fld>
           </a:p>
@@ -2246,7 +2160,7 @@
         <p:txBody>
           <a:bodyPr/>
           <a:p>
-            <a:fld id="{E3D04C2C-66A6-43F2-9863-22C0870F9D41}" type="slidenum">
+            <a:fld id="{F4CF8A5E-08D3-4B06-A25E-4C07AC8C084B}" type="slidenum">
               <a:t>&lt;#&gt;</a:t>
             </a:fld>
           </a:p>
@@ -2403,7 +2317,7 @@
         <p:txBody>
           <a:bodyPr/>
           <a:p>
-            <a:fld id="{AD00820A-0BCA-49AD-828A-EAE71019F84A}" type="slidenum">
+            <a:fld id="{35812123-0785-4B30-B918-8DF7375D51EB}" type="slidenum">
               <a:t>&lt;#&gt;</a:t>
             </a:fld>
           </a:p>
@@ -2557,7 +2471,7 @@
         <p:txBody>
           <a:bodyPr/>
           <a:p>
-            <a:fld id="{F6ECA115-47A0-4E15-903D-989B10ACD476}" type="slidenum">
+            <a:fld id="{8838DA58-1DFB-44A1-B196-6A174D4A965C}" type="slidenum">
               <a:t>&lt;#&gt;</a:t>
             </a:fld>
           </a:p>
@@ -2745,7 +2659,7 @@
         <p:txBody>
           <a:bodyPr/>
           <a:p>
-            <a:fld id="{24F821EE-9A22-4F88-B0B2-3ABF196A3C58}" type="slidenum">
+            <a:fld id="{F34CBE88-2619-4022-9685-3F6D40065E33}" type="slidenum">
               <a:t>&lt;#&gt;</a:t>
             </a:fld>
           </a:p>
@@ -2865,7 +2779,7 @@
         <p:txBody>
           <a:bodyPr/>
           <a:p>
-            <a:fld id="{78C434E7-5645-4093-B684-8044E5755D79}" type="slidenum">
+            <a:fld id="{5AEDC482-B023-4809-A27E-2292170E3E94}" type="slidenum">
               <a:t>&lt;#&gt;</a:t>
             </a:fld>
           </a:p>
@@ -2985,7 +2899,7 @@
         <p:txBody>
           <a:bodyPr/>
           <a:p>
-            <a:fld id="{FD15A490-3C7E-4680-AF4D-4562E1ACC4C0}" type="slidenum">
+            <a:fld id="{255C12DB-F3D9-4177-A93F-0229DD4779EF}" type="slidenum">
               <a:t>&lt;#&gt;</a:t>
             </a:fld>
           </a:p>
@@ -3207,7 +3121,7 @@
         <p:txBody>
           <a:bodyPr/>
           <a:p>
-            <a:fld id="{6ADF691C-B9D4-497A-B463-5ECA9181864E}" type="slidenum">
+            <a:fld id="{65AE4EE3-BBE4-44AC-AC6E-45000C71ADEF}" type="slidenum">
               <a:t>&lt;#&gt;</a:t>
             </a:fld>
           </a:p>
@@ -3429,7 +3343,7 @@
         <p:txBody>
           <a:bodyPr/>
           <a:p>
-            <a:fld id="{81DDBD79-000B-4038-ABCF-E6DE7C0DF631}" type="slidenum">
+            <a:fld id="{C5A30F59-BEEA-4666-A3F8-6CB0034D58E5}" type="slidenum">
               <a:t>&lt;#&gt;</a:t>
             </a:fld>
           </a:p>
@@ -3651,7 +3565,7 @@
         <p:txBody>
           <a:bodyPr/>
           <a:p>
-            <a:fld id="{09A43CD8-45A9-4260-B512-F2A70E5373A9}" type="slidenum">
+            <a:fld id="{37888DA4-BB27-4E10-B4AC-F37D38C3D4FA}" type="slidenum">
               <a:t>&lt;#&gt;</a:t>
             </a:fld>
           </a:p>
@@ -4070,7 +3984,7 @@
             <a:pPr algn="r">
               <a:buNone/>
             </a:pPr>
-            <a:fld id="{A52E590E-7227-4D93-82D2-3C4DE235C8AE}" type="slidenum">
+            <a:fld id="{5937098E-3F9E-4F08-9649-B298129C30CD}" type="slidenum">
               <a:rPr b="0" lang="en-US" sz="1400" spc="-1" strike="noStrike">
                 <a:latin typeface="Times New Roman"/>
               </a:rPr>
@@ -4243,7 +4157,7 @@
       </p:grpSpPr>
       <p:sp>
         <p:nvSpPr>
-          <p:cNvPr id="70" name="PlaceHolder 1"/>
+          <p:cNvPr id="69" name="PlaceHolder 1"/>
           <p:cNvSpPr>
             <a:spLocks noGrp="1"/>
           </p:cNvSpPr>
@@ -4279,7 +4193,7 @@
                 </a:solidFill>
                 <a:latin typeface="Arial"/>
               </a:rPr>
-              <a:t>Is this a hack?</a:t>
+              <a:t>Act 2 · Coins from nowhere</a:t>
             </a:r>
             <a:endParaRPr b="0" lang="en-US" sz="4400" spc="-1" strike="noStrike">
               <a:latin typeface="Arial"/>
@@ -4287,457 +4201,146 @@
           </a:p>
         </p:txBody>
       </p:sp>
-      <p:graphicFrame>
-        <p:nvGraphicFramePr>
-          <p:cNvPr id="71" name="Table9"/>
-          <p:cNvGraphicFramePr/>
+      <p:pic>
+        <p:nvPicPr>
+          <p:cNvPr id="70" name="Image9" descr="act3-mint"/>
+          <p:cNvPicPr/>
           <p:nvPr/>
-        </p:nvGraphicFramePr>
-        <p:xfrm>
-          <a:off x="504000" y="1296000"/>
-          <a:ext cx="9071640" cy="2104200"/>
-        </p:xfrm>
-        <a:graphic>
-          <a:graphicData uri="http://schemas.openxmlformats.org/drawingml/2006/table">
-            <a:tbl>
-              <a:tblPr/>
-              <a:tblGrid>
-                <a:gridCol w="3024000"/>
-                <a:gridCol w="3024000"/>
-                <a:gridCol w="3024000"/>
-              </a:tblGrid>
-              <a:tr h="450000">
-                <a:tc>
-                  <a:txBody>
-                    <a:bodyPr lIns="90000" rIns="90000" tIns="45000" bIns="45000" anchor="t">
-                      <a:noAutofit/>
-                    </a:bodyPr>
-                    <a:p>
-                      <a:r>
-                        <a:rPr b="0" lang="en-US" sz="1800" spc="-1" strike="noStrike">
-                          <a:latin typeface="Arial"/>
-                        </a:rPr>
-                        <a:t>Who sends the upgrade</a:t>
-                      </a:r>
-                      <a:endParaRPr b="0" lang="en-US" sz="1800" spc="-1" strike="noStrike">
-                        <a:latin typeface="Arial"/>
-                      </a:endParaRPr>
-                    </a:p>
-                  </a:txBody>
-                  <a:tcPr anchor="t" marL="90000" marR="90000">
-                    <a:lnL>
-                      <a:noFill/>
-                    </a:lnL>
-                    <a:lnR>
-                      <a:noFill/>
-                    </a:lnR>
-                    <a:lnT>
-                      <a:noFill/>
-                    </a:lnT>
-                    <a:lnB>
-                      <a:noFill/>
-                    </a:lnB>
-                    <a:solidFill>
-                      <a:srgbClr val="729fcf"/>
-                    </a:solidFill>
-                  </a:tcPr>
-                </a:tc>
-                <a:tc>
-                  <a:txBody>
-                    <a:bodyPr lIns="90000" rIns="90000" tIns="45000" bIns="45000" anchor="t">
-                      <a:noAutofit/>
-                    </a:bodyPr>
-                    <a:p>
-                      <a:r>
-                        <a:rPr b="0" lang="en-US" sz="1800" spc="-1" strike="noStrike">
-                          <a:latin typeface="Arial"/>
-                        </a:rPr>
-                        <a:t>What it is</a:t>
-                      </a:r>
-                      <a:endParaRPr b="0" lang="en-US" sz="1800" spc="-1" strike="noStrike">
-                        <a:latin typeface="Arial"/>
-                      </a:endParaRPr>
-                    </a:p>
-                  </a:txBody>
-                  <a:tcPr anchor="t" marL="90000" marR="90000">
-                    <a:lnL>
-                      <a:noFill/>
-                    </a:lnL>
-                    <a:lnR>
-                      <a:noFill/>
-                    </a:lnR>
-                    <a:lnT>
-                      <a:noFill/>
-                    </a:lnT>
-                    <a:lnB>
-                      <a:noFill/>
-                    </a:lnB>
-                    <a:solidFill>
-                      <a:srgbClr val="729fcf"/>
-                    </a:solidFill>
-                  </a:tcPr>
-                </a:tc>
-                <a:tc>
-                  <a:txBody>
-                    <a:bodyPr lIns="90000" rIns="90000" tIns="45000" bIns="45000" anchor="t">
-                      <a:noAutofit/>
-                    </a:bodyPr>
-                    <a:p>
-                      <a:r>
-                        <a:rPr b="0" lang="en-US" sz="1800" spc="-1" strike="noStrike">
-                          <a:latin typeface="Arial"/>
-                        </a:rPr>
-                        <a:t>Effect</a:t>
-                      </a:r>
-                      <a:endParaRPr b="0" lang="en-US" sz="1800" spc="-1" strike="noStrike">
-                        <a:latin typeface="Arial"/>
-                      </a:endParaRPr>
-                    </a:p>
-                  </a:txBody>
-                  <a:tcPr anchor="t" marL="90000" marR="90000">
-                    <a:lnL>
-                      <a:noFill/>
-                    </a:lnL>
-                    <a:lnR>
-                      <a:noFill/>
-                    </a:lnR>
-                    <a:lnT>
-                      <a:noFill/>
-                    </a:lnT>
-                    <a:lnB>
-                      <a:noFill/>
-                    </a:lnB>
-                    <a:solidFill>
-                      <a:srgbClr val="729fcf"/>
-                    </a:solidFill>
-                  </a:tcPr>
-                </a:tc>
-              </a:tr>
-              <a:tr h="450000">
-                <a:tc>
-                  <a:txBody>
-                    <a:bodyPr lIns="90000" rIns="90000" tIns="45000" bIns="45000" anchor="t">
-                      <a:noAutofit/>
-                    </a:bodyPr>
-                    <a:p>
-                      <a:r>
-                        <a:rPr b="0" lang="en-US" sz="1800" spc="-1" strike="noStrike">
-                          <a:latin typeface="Arial"/>
-                        </a:rPr>
-                        <a:t>Someone with 2 stolen keys</a:t>
-                      </a:r>
-                      <a:endParaRPr b="0" lang="en-US" sz="1800" spc="-1" strike="noStrike">
-                        <a:latin typeface="Arial"/>
-                      </a:endParaRPr>
-                    </a:p>
-                  </a:txBody>
-                  <a:tcPr anchor="t" marL="90000" marR="90000">
-                    <a:lnL>
-                      <a:noFill/>
-                    </a:lnL>
-                    <a:lnR>
-                      <a:noFill/>
-                    </a:lnR>
-                    <a:lnT>
-                      <a:noFill/>
-                    </a:lnT>
-                    <a:lnB>
-                      <a:noFill/>
-                    </a:lnB>
-                    <a:solidFill>
-                      <a:srgbClr val="729fcf"/>
-                    </a:solidFill>
-                  </a:tcPr>
-                </a:tc>
-                <a:tc>
-                  <a:txBody>
-                    <a:bodyPr lIns="90000" rIns="90000" tIns="45000" bIns="45000" anchor="t">
-                      <a:noAutofit/>
-                    </a:bodyPr>
-                    <a:p>
-                      <a:r>
-                        <a:rPr b="0" lang="en-US" sz="1800" spc="-1" strike="noStrike">
-                          <a:latin typeface="Arial"/>
-                        </a:rPr>
-                        <a:t>A hack</a:t>
-                      </a:r>
-                      <a:endParaRPr b="0" lang="en-US" sz="1800" spc="-1" strike="noStrike">
-                        <a:latin typeface="Arial"/>
-                      </a:endParaRPr>
-                    </a:p>
-                  </a:txBody>
-                  <a:tcPr anchor="t" marL="90000" marR="90000">
-                    <a:lnL>
-                      <a:noFill/>
-                    </a:lnL>
-                    <a:lnR>
-                      <a:noFill/>
-                    </a:lnR>
-                    <a:lnT>
-                      <a:noFill/>
-                    </a:lnT>
-                    <a:lnB>
-                      <a:noFill/>
-                    </a:lnB>
-                    <a:solidFill>
-                      <a:srgbClr val="729fcf"/>
-                    </a:solidFill>
-                  </a:tcPr>
-                </a:tc>
-                <a:tc>
-                  <a:txBody>
-                    <a:bodyPr lIns="90000" rIns="90000" tIns="45000" bIns="45000" anchor="t">
-                      <a:noAutofit/>
-                    </a:bodyPr>
-                    <a:p>
-                      <a:r>
-                        <a:rPr b="0" lang="en-US" sz="1800" spc="-1" strike="noStrike">
-                          <a:latin typeface="Arial"/>
-                        </a:rPr>
-                        <a:t>Price set by the attacker</a:t>
-                      </a:r>
-                      <a:endParaRPr b="0" lang="en-US" sz="1800" spc="-1" strike="noStrike">
-                        <a:latin typeface="Arial"/>
-                      </a:endParaRPr>
-                    </a:p>
-                  </a:txBody>
-                  <a:tcPr anchor="t" marL="90000" marR="90000">
-                    <a:lnL>
-                      <a:noFill/>
-                    </a:lnL>
-                    <a:lnR>
-                      <a:noFill/>
-                    </a:lnR>
-                    <a:lnT>
-                      <a:noFill/>
-                    </a:lnT>
-                    <a:lnB>
-                      <a:noFill/>
-                    </a:lnB>
-                    <a:solidFill>
-                      <a:srgbClr val="729fcf"/>
-                    </a:solidFill>
-                  </a:tcPr>
-                </a:tc>
-              </a:tr>
-              <a:tr h="450000">
-                <a:tc>
-                  <a:txBody>
-                    <a:bodyPr lIns="90000" rIns="90000" tIns="45000" bIns="45000" anchor="t">
-                      <a:noAutofit/>
-                    </a:bodyPr>
-                    <a:p>
-                      <a:r>
-                        <a:rPr b="0" lang="en-US" sz="1800" spc="-1" strike="noStrike">
-                          <a:latin typeface="Arial"/>
-                        </a:rPr>
-                        <a:t>The real signers, by mistake</a:t>
-                      </a:r>
-                      <a:endParaRPr b="0" lang="en-US" sz="1800" spc="-1" strike="noStrike">
-                        <a:latin typeface="Arial"/>
-                      </a:endParaRPr>
-                    </a:p>
-                  </a:txBody>
-                  <a:tcPr anchor="t" marL="90000" marR="90000">
-                    <a:lnL>
-                      <a:noFill/>
-                    </a:lnL>
-                    <a:lnR>
-                      <a:noFill/>
-                    </a:lnR>
-                    <a:lnT>
-                      <a:noFill/>
-                    </a:lnT>
-                    <a:lnB>
-                      <a:noFill/>
-                    </a:lnB>
-                    <a:solidFill>
-                      <a:srgbClr val="729fcf"/>
-                    </a:solidFill>
-                  </a:tcPr>
-                </a:tc>
-                <a:tc>
-                  <a:txBody>
-                    <a:bodyPr lIns="90000" rIns="90000" tIns="45000" bIns="45000" anchor="t">
-                      <a:noAutofit/>
-                    </a:bodyPr>
-                    <a:p>
-                      <a:r>
-                        <a:rPr b="0" lang="en-US" sz="1800" spc="-1" strike="noStrike">
-                          <a:latin typeface="Arial"/>
-                        </a:rPr>
-                        <a:t>A bad upgrade</a:t>
-                      </a:r>
-                      <a:endParaRPr b="0" lang="en-US" sz="1800" spc="-1" strike="noStrike">
-                        <a:latin typeface="Arial"/>
-                      </a:endParaRPr>
-                    </a:p>
-                  </a:txBody>
-                  <a:tcPr anchor="t" marL="90000" marR="90000">
-                    <a:lnL>
-                      <a:noFill/>
-                    </a:lnL>
-                    <a:lnR>
-                      <a:noFill/>
-                    </a:lnR>
-                    <a:lnT>
-                      <a:noFill/>
-                    </a:lnT>
-                    <a:lnB>
-                      <a:noFill/>
-                    </a:lnB>
-                    <a:solidFill>
-                      <a:srgbClr val="729fcf"/>
-                    </a:solidFill>
-                  </a:tcPr>
-                </a:tc>
-                <a:tc>
-                  <a:txBody>
-                    <a:bodyPr lIns="90000" rIns="90000" tIns="45000" bIns="45000" anchor="t">
-                      <a:noAutofit/>
-                    </a:bodyPr>
-                    <a:p>
-                      <a:r>
-                        <a:rPr b="0" lang="en-US" sz="1800" spc="-1" strike="noStrike">
-                          <a:latin typeface="Arial"/>
-                        </a:rPr>
-                        <a:t>Same damage</a:t>
-                      </a:r>
-                      <a:endParaRPr b="0" lang="en-US" sz="1800" spc="-1" strike="noStrike">
-                        <a:latin typeface="Arial"/>
-                      </a:endParaRPr>
-                    </a:p>
-                  </a:txBody>
-                  <a:tcPr anchor="t" marL="90000" marR="90000">
-                    <a:lnL>
-                      <a:noFill/>
-                    </a:lnL>
-                    <a:lnR>
-                      <a:noFill/>
-                    </a:lnR>
-                    <a:lnT>
-                      <a:noFill/>
-                    </a:lnT>
-                    <a:lnB>
-                      <a:noFill/>
-                    </a:lnB>
-                    <a:solidFill>
-                      <a:srgbClr val="729fcf"/>
-                    </a:solidFill>
-                  </a:tcPr>
-                </a:tc>
-              </a:tr>
-              <a:tr h="450000">
-                <a:tc>
-                  <a:txBody>
-                    <a:bodyPr lIns="90000" rIns="90000" tIns="45000" bIns="45000" anchor="t">
-                      <a:noAutofit/>
-                    </a:bodyPr>
-                    <a:p>
-                      <a:r>
-                        <a:rPr b="0" lang="en-US" sz="1800" spc="-1" strike="noStrike">
-                          <a:latin typeface="Arial"/>
-                        </a:rPr>
-                        <a:t>The real signers, announced</a:t>
-                      </a:r>
-                      <a:endParaRPr b="0" lang="en-US" sz="1800" spc="-1" strike="noStrike">
-                        <a:latin typeface="Arial"/>
-                      </a:endParaRPr>
-                    </a:p>
-                  </a:txBody>
-                  <a:tcPr anchor="t" marL="90000" marR="90000">
-                    <a:lnL>
-                      <a:noFill/>
-                    </a:lnL>
-                    <a:lnR>
-                      <a:noFill/>
-                    </a:lnR>
-                    <a:lnT>
-                      <a:noFill/>
-                    </a:lnT>
-                    <a:lnB>
-                      <a:noFill/>
-                    </a:lnB>
-                    <a:solidFill>
-                      <a:srgbClr val="729fcf"/>
-                    </a:solidFill>
-                  </a:tcPr>
-                </a:tc>
-                <a:tc>
-                  <a:txBody>
-                    <a:bodyPr lIns="90000" rIns="90000" tIns="45000" bIns="45000" anchor="t">
-                      <a:noAutofit/>
-                    </a:bodyPr>
-                    <a:p>
-                      <a:r>
-                        <a:rPr b="0" lang="en-US" sz="1800" spc="-1" strike="noStrike">
-                          <a:latin typeface="Arial"/>
-                        </a:rPr>
-                        <a:t>Maintenance</a:t>
-                      </a:r>
-                      <a:endParaRPr b="0" lang="en-US" sz="1800" spc="-1" strike="noStrike">
-                        <a:latin typeface="Arial"/>
-                      </a:endParaRPr>
-                    </a:p>
-                  </a:txBody>
-                  <a:tcPr anchor="t" marL="90000" marR="90000">
-                    <a:lnL>
-                      <a:noFill/>
-                    </a:lnL>
-                    <a:lnR>
-                      <a:noFill/>
-                    </a:lnR>
-                    <a:lnT>
-                      <a:noFill/>
-                    </a:lnT>
-                    <a:lnB>
-                      <a:noFill/>
-                    </a:lnB>
-                    <a:solidFill>
-                      <a:srgbClr val="729fcf"/>
-                    </a:solidFill>
-                  </a:tcPr>
-                </a:tc>
-                <a:tc>
-                  <a:txBody>
-                    <a:bodyPr lIns="90000" rIns="90000" tIns="45000" bIns="45000" anchor="t">
-                      <a:noAutofit/>
-                    </a:bodyPr>
-                    <a:p>
-                      <a:r>
-                        <a:rPr b="0" lang="en-US" sz="1800" spc="-1" strike="noStrike">
-                          <a:latin typeface="Arial"/>
-                        </a:rPr>
-                        <a:t>Nothing bad</a:t>
-                      </a:r>
-                      <a:endParaRPr b="0" lang="en-US" sz="1800" spc="-1" strike="noStrike">
-                        <a:latin typeface="Arial"/>
-                      </a:endParaRPr>
-                    </a:p>
-                  </a:txBody>
-                  <a:tcPr anchor="t" marL="90000" marR="90000">
-                    <a:lnL>
-                      <a:noFill/>
-                    </a:lnL>
-                    <a:lnR>
-                      <a:noFill/>
-                    </a:lnR>
-                    <a:lnT>
-                      <a:noFill/>
-                    </a:lnT>
-                    <a:lnB>
-                      <a:noFill/>
-                    </a:lnB>
-                    <a:solidFill>
-                      <a:srgbClr val="729fcf"/>
-                    </a:solidFill>
-                  </a:tcPr>
-                </a:tc>
-              </a:tr>
-            </a:tbl>
-          </a:graphicData>
-        </a:graphic>
-      </p:graphicFrame>
+        </p:nvPicPr>
+        <p:blipFill>
+          <a:blip r:embed="rId1"/>
+          <a:stretch/>
+        </p:blipFill>
+        <p:spPr>
+          <a:xfrm>
+            <a:off x="1620000" y="1224000"/>
+            <a:ext cx="6840000" cy="2624400"/>
+          </a:xfrm>
+          <a:prstGeom prst="rect">
+            <a:avLst/>
+          </a:prstGeom>
+          <a:ln w="0">
+            <a:noFill/>
+          </a:ln>
+        </p:spPr>
+      </p:pic>
+      <p:sp>
+        <p:nvSpPr>
+          <p:cNvPr id="71" name="Caption9"/>
+          <p:cNvSpPr txBox="1"/>
+          <p:nvPr/>
+        </p:nvSpPr>
+        <p:spPr>
+          <a:xfrm>
+            <a:off x="576000" y="3956400"/>
+            <a:ext cx="9000000" cy="1587600"/>
+          </a:xfrm>
+          <a:prstGeom prst="rect">
+            <a:avLst/>
+          </a:prstGeom>
+          <a:noFill/>
+          <a:ln w="0">
+            <a:noFill/>
+          </a:ln>
+        </p:spPr>
+        <p:txBody>
+          <a:bodyPr lIns="90000" rIns="90000" tIns="45000" bIns="45000" anchor="t">
+            <a:noAutofit/>
+          </a:bodyPr>
+          <a:p>
+            <a:r>
+              <a:rPr b="0" lang="en-US" sz="1900" spc="-1" strike="noStrike">
+                <a:solidFill>
+                  <a:srgbClr val="222222"/>
+                </a:solidFill>
+                <a:latin typeface="Arial"/>
+              </a:rPr>
+              <a:t>• </a:t>
+            </a:r>
+            <a:r>
+              <a:rPr b="0" lang="en-US" sz="1900" spc="-1" strike="noStrike">
+                <a:solidFill>
+                  <a:srgbClr val="222222"/>
+                </a:solidFill>
+                <a:latin typeface="Arial"/>
+              </a:rPr>
+              <a:t>The bridge pool creates 15M PST, +7 % of the supply</a:t>
+            </a:r>
+            <a:endParaRPr b="0" lang="en-US" sz="1900" spc="-1" strike="noStrike">
+              <a:latin typeface="Arial"/>
+            </a:endParaRPr>
+          </a:p>
+          <a:p>
+            <a:r>
+              <a:rPr b="0" lang="en-US" sz="1900" spc="-1" strike="noStrike">
+                <a:solidFill>
+                  <a:srgbClr val="222222"/>
+                </a:solidFill>
+                <a:latin typeface="Arial"/>
+              </a:rPr>
+              <a:t>• </a:t>
+            </a:r>
+            <a:r>
+              <a:rPr b="0" lang="en-US" sz="1900" spc="-1" strike="noStrike">
+                <a:solidFill>
+                  <a:srgbClr val="222222"/>
+                </a:solidFill>
+                <a:latin typeface="Arial"/>
+              </a:rPr>
+              <a:t>Nothing backs these new coins</a:t>
+            </a:r>
+            <a:endParaRPr b="0" lang="en-US" sz="1900" spc="-1" strike="noStrike">
+              <a:latin typeface="Arial"/>
+            </a:endParaRPr>
+          </a:p>
+          <a:p>
+            <a:r>
+              <a:rPr b="0" lang="en-US" sz="1900" spc="-1" strike="noStrike">
+                <a:solidFill>
+                  <a:srgbClr val="222222"/>
+                </a:solidFill>
+                <a:latin typeface="Arial"/>
+              </a:rPr>
+              <a:t>• </a:t>
+            </a:r>
+            <a:r>
+              <a:rPr b="0" lang="en-US" sz="1900" spc="-1" strike="noStrike">
+                <a:solidFill>
+                  <a:srgbClr val="222222"/>
+                </a:solidFill>
+                <a:latin typeface="Arial"/>
+              </a:rPr>
+              <a:t>The oracle reads a rate, not the supply: it still says 1.138</a:t>
+            </a:r>
+            <a:endParaRPr b="0" lang="en-US" sz="1900" spc="-1" strike="noStrike">
+              <a:latin typeface="Arial"/>
+            </a:endParaRPr>
+          </a:p>
+          <a:p>
+            <a:r>
+              <a:rPr b="0" lang="en-US" sz="1900" spc="-1" strike="noStrike">
+                <a:solidFill>
+                  <a:srgbClr val="222222"/>
+                </a:solidFill>
+                <a:latin typeface="Arial"/>
+              </a:rPr>
+              <a:t>• </a:t>
+            </a:r>
+            <a:r>
+              <a:rPr b="0" lang="en-US" sz="1900" spc="-1" strike="noStrike">
+                <a:solidFill>
+                  <a:srgbClr val="222222"/>
+                </a:solidFill>
+                <a:latin typeface="Arial"/>
+              </a:rPr>
+              <a:t>riskdep flags the mint itself, in the same block</a:t>
+            </a:r>
+            <a:endParaRPr b="0" lang="en-US" sz="1900" spc="-1" strike="noStrike">
+              <a:latin typeface="Arial"/>
+            </a:endParaRPr>
+          </a:p>
+        </p:txBody>
+      </p:sp>
     </p:spTree>
   </p:cSld>
   <mc:AlternateContent>
@@ -4806,7 +4409,7 @@
                 </a:solidFill>
                 <a:latin typeface="Arial"/>
               </a:rPr>
-              <a:t>Act 3 · Coins from nowhere</a:t>
+              <a:t>Reading a Telegram alert</a:t>
             </a:r>
             <a:endParaRPr b="0" lang="en-US" sz="4400" spc="-1" strike="noStrike">
               <a:latin typeface="Arial"/>
@@ -4814,39 +4417,20 @@
           </a:p>
         </p:txBody>
       </p:sp>
-      <p:pic>
-        <p:nvPicPr>
-          <p:cNvPr id="73" name="Image10" descr="act3-mint"/>
-          <p:cNvPicPr/>
-          <p:nvPr/>
-        </p:nvPicPr>
-        <p:blipFill>
-          <a:blip r:embed="rId1"/>
-          <a:stretch/>
-        </p:blipFill>
-        <p:spPr>
-          <a:xfrm>
-            <a:off x="1620000" y="1224000"/>
-            <a:ext cx="6840000" cy="2624400"/>
-          </a:xfrm>
-          <a:prstGeom prst="rect">
-            <a:avLst/>
-          </a:prstGeom>
-          <a:ln w="0">
-            <a:noFill/>
-          </a:ln>
-        </p:spPr>
-      </p:pic>
-      <p:sp>
-        <p:nvSpPr>
-          <p:cNvPr id="74" name="Caption10"/>
-          <p:cNvSpPr txBox="1"/>
-          <p:nvPr/>
-        </p:nvSpPr>
-        <p:spPr>
-          <a:xfrm>
-            <a:off x="576000" y="3956400"/>
-            <a:ext cx="9000000" cy="1587600"/>
+      <p:sp>
+        <p:nvSpPr>
+          <p:cNvPr id="73" name="PlaceHolder 2"/>
+          <p:cNvSpPr>
+            <a:spLocks noGrp="1"/>
+          </p:cNvSpPr>
+          <p:nvPr>
+            <p:ph/>
+          </p:nvPr>
+        </p:nvSpPr>
+        <p:spPr>
+          <a:xfrm>
+            <a:off x="504000" y="1326600"/>
+            <a:ext cx="9071640" cy="3288240"/>
           </a:xfrm>
           <a:prstGeom prst="rect">
             <a:avLst/>
@@ -4857,98 +4441,131 @@
           </a:ln>
         </p:spPr>
         <p:txBody>
-          <a:bodyPr lIns="90000" rIns="90000" tIns="45000" bIns="45000" anchor="t">
-            <a:noAutofit/>
+          <a:bodyPr lIns="0" rIns="0" tIns="0" bIns="0" anchor="t">
+            <a:normAutofit fontScale="87000"/>
           </a:bodyPr>
           <a:p>
-            <a:r>
-              <a:rPr b="0" lang="en-US" sz="1900" spc="-1" strike="noStrike">
+            <a:pPr marL="432000" indent="-324000">
+              <a:spcBef>
+                <a:spcPts val="1417"/>
+              </a:spcBef>
+              <a:buClr>
+                <a:srgbClr val="000000"/>
+              </a:buClr>
+              <a:buSzPct val="45000"/>
+              <a:buFont typeface="Wingdings" charset="2"/>
+              <a:buChar char=""/>
+            </a:pPr>
+            <a:r>
+              <a:rPr b="0" lang="en-US" sz="3200" spc="-1" strike="noStrike">
                 <a:solidFill>
                   <a:srgbClr val="222222"/>
                 </a:solidFill>
                 <a:latin typeface="Arial"/>
               </a:rPr>
-              <a:t>• </a:t>
-            </a:r>
-            <a:r>
-              <a:rPr b="0" lang="en-US" sz="1900" spc="-1" strike="noStrike">
+              <a:t>One message per incident; red (critical) rings the phone</a:t>
+            </a:r>
+            <a:endParaRPr b="0" lang="en-US" sz="3200" spc="-1" strike="noStrike">
+              <a:latin typeface="Arial"/>
+            </a:endParaRPr>
+          </a:p>
+          <a:p>
+            <a:pPr marL="432000" indent="-324000">
+              <a:spcBef>
+                <a:spcPts val="1417"/>
+              </a:spcBef>
+              <a:buClr>
+                <a:srgbClr val="000000"/>
+              </a:buClr>
+              <a:buSzPct val="45000"/>
+              <a:buFont typeface="Wingdings" charset="2"/>
+              <a:buChar char=""/>
+            </a:pPr>
+            <a:r>
+              <a:rPr b="0" lang="en-US" sz="3200" spc="-1" strike="noStrike">
                 <a:solidFill>
                   <a:srgbClr val="222222"/>
                 </a:solidFill>
                 <a:latin typeface="Arial"/>
               </a:rPr>
-              <a:t>The bridge pool creates 15M PST, +7 % of the supply</a:t>
-            </a:r>
-            <a:endParaRPr b="0" lang="en-US" sz="1900" spc="-1" strike="noStrike">
-              <a:latin typeface="Arial"/>
-            </a:endParaRPr>
-          </a:p>
-          <a:p>
-            <a:r>
-              <a:rPr b="0" lang="en-US" sz="1900" spc="-1" strike="noStrike">
+              <a:t>First line: the vault and what happened, in plain words</a:t>
+            </a:r>
+            <a:endParaRPr b="0" lang="en-US" sz="3200" spc="-1" strike="noStrike">
+              <a:latin typeface="Arial"/>
+            </a:endParaRPr>
+          </a:p>
+          <a:p>
+            <a:pPr marL="432000" indent="-324000">
+              <a:spcBef>
+                <a:spcPts val="1417"/>
+              </a:spcBef>
+              <a:buClr>
+                <a:srgbClr val="000000"/>
+              </a:buClr>
+              <a:buSzPct val="45000"/>
+              <a:buFont typeface="Wingdings" charset="2"/>
+              <a:buChar char=""/>
+            </a:pPr>
+            <a:r>
+              <a:rPr b="0" lang="en-US" sz="3200" spc="-1" strike="noStrike">
                 <a:solidFill>
                   <a:srgbClr val="222222"/>
                 </a:solidFill>
                 <a:latin typeface="Arial"/>
               </a:rPr>
-              <a:t>• </a:t>
-            </a:r>
-            <a:r>
-              <a:rPr b="0" lang="en-US" sz="1900" spc="-1" strike="noStrike">
+              <a:t>Then the loss and the decision: EXIT or STAY</a:t>
+            </a:r>
+            <a:endParaRPr b="0" lang="en-US" sz="3200" spc="-1" strike="noStrike">
+              <a:latin typeface="Arial"/>
+            </a:endParaRPr>
+          </a:p>
+          <a:p>
+            <a:pPr marL="432000" indent="-324000">
+              <a:spcBef>
+                <a:spcPts val="1417"/>
+              </a:spcBef>
+              <a:buClr>
+                <a:srgbClr val="000000"/>
+              </a:buClr>
+              <a:buSzPct val="45000"/>
+              <a:buFont typeface="Wingdings" charset="2"/>
+              <a:buChar char=""/>
+            </a:pPr>
+            <a:r>
+              <a:rPr b="0" lang="en-US" sz="3200" spc="-1" strike="noStrike">
                 <a:solidFill>
                   <a:srgbClr val="222222"/>
                 </a:solidFill>
                 <a:latin typeface="Arial"/>
               </a:rPr>
-              <a:t>Nothing backs these new coins</a:t>
-            </a:r>
-            <a:endParaRPr b="0" lang="en-US" sz="1900" spc="-1" strike="noStrike">
-              <a:latin typeface="Arial"/>
-            </a:endParaRPr>
-          </a:p>
-          <a:p>
-            <a:r>
-              <a:rPr b="0" lang="en-US" sz="1900" spc="-1" strike="noStrike">
+              <a:t>Details folded underneath: tap to open</a:t>
+            </a:r>
+            <a:endParaRPr b="0" lang="en-US" sz="3200" spc="-1" strike="noStrike">
+              <a:latin typeface="Arial"/>
+            </a:endParaRPr>
+          </a:p>
+          <a:p>
+            <a:pPr marL="432000" indent="-324000">
+              <a:spcBef>
+                <a:spcPts val="1417"/>
+              </a:spcBef>
+              <a:buClr>
+                <a:srgbClr val="000000"/>
+              </a:buClr>
+              <a:buSzPct val="45000"/>
+              <a:buFont typeface="Wingdings" charset="2"/>
+              <a:buChar char=""/>
+            </a:pPr>
+            <a:r>
+              <a:rPr b="0" lang="en-US" sz="3200" spc="-1" strike="noStrike">
                 <a:solidFill>
                   <a:srgbClr val="222222"/>
                 </a:solidFill>
                 <a:latin typeface="Arial"/>
               </a:rPr>
-              <a:t>• </a:t>
-            </a:r>
-            <a:r>
-              <a:rPr b="0" lang="en-US" sz="1900" spc="-1" strike="noStrike">
-                <a:solidFill>
-                  <a:srgbClr val="222222"/>
-                </a:solidFill>
-                <a:latin typeface="Arial"/>
-              </a:rPr>
-              <a:t>The oracle reads a rate, not the supply: it still says 1.138</a:t>
-            </a:r>
-            <a:endParaRPr b="0" lang="en-US" sz="1900" spc="-1" strike="noStrike">
-              <a:latin typeface="Arial"/>
-            </a:endParaRPr>
-          </a:p>
-          <a:p>
-            <a:r>
-              <a:rPr b="0" lang="en-US" sz="1900" spc="-1" strike="noStrike">
-                <a:solidFill>
-                  <a:srgbClr val="222222"/>
-                </a:solidFill>
-                <a:latin typeface="Arial"/>
-              </a:rPr>
-              <a:t>• </a:t>
-            </a:r>
-            <a:r>
-              <a:rPr b="0" lang="en-US" sz="1900" spc="-1" strike="noStrike">
-                <a:solidFill>
-                  <a:srgbClr val="222222"/>
-                </a:solidFill>
-                <a:latin typeface="Arial"/>
-              </a:rPr>
-              <a:t>riskdep flags the mint itself, in the same block</a:t>
-            </a:r>
-            <a:endParaRPr b="0" lang="en-US" sz="1900" spc="-1" strike="noStrike">
+              <a:t>A 'What to do' button opens the runbook</a:t>
+            </a:r>
+            <a:endParaRPr b="0" lang="en-US" sz="3200" spc="-1" strike="noStrike">
               <a:latin typeface="Arial"/>
             </a:endParaRPr>
           </a:p>
@@ -4986,7 +4603,7 @@
       </p:grpSpPr>
       <p:sp>
         <p:nvSpPr>
-          <p:cNvPr id="75" name="PlaceHolder 1"/>
+          <p:cNvPr id="74" name="PlaceHolder 1"/>
           <p:cNvSpPr>
             <a:spLocks noGrp="1"/>
           </p:cNvSpPr>
@@ -5022,7 +4639,7 @@
                 </a:solidFill>
                 <a:latin typeface="Arial"/>
               </a:rPr>
-              <a:t>Reading a Telegram alert</a:t>
+              <a:t>What to remember</a:t>
             </a:r>
             <a:endParaRPr b="0" lang="en-US" sz="4400" spc="-1" strike="noStrike">
               <a:latin typeface="Arial"/>
@@ -5032,237 +4649,7 @@
       </p:sp>
       <p:sp>
         <p:nvSpPr>
-          <p:cNvPr id="76" name="PlaceHolder 2"/>
-          <p:cNvSpPr>
-            <a:spLocks noGrp="1"/>
-          </p:cNvSpPr>
-          <p:nvPr>
-            <p:ph/>
-          </p:nvPr>
-        </p:nvSpPr>
-        <p:spPr>
-          <a:xfrm>
-            <a:off x="504000" y="1326600"/>
-            <a:ext cx="9071640" cy="3288240"/>
-          </a:xfrm>
-          <a:prstGeom prst="rect">
-            <a:avLst/>
-          </a:prstGeom>
-          <a:noFill/>
-          <a:ln w="0">
-            <a:noFill/>
-          </a:ln>
-        </p:spPr>
-        <p:txBody>
-          <a:bodyPr lIns="0" rIns="0" tIns="0" bIns="0" anchor="t">
-            <a:normAutofit fontScale="81000"/>
-          </a:bodyPr>
-          <a:p>
-            <a:pPr marL="432000" indent="-324000">
-              <a:spcBef>
-                <a:spcPts val="1417"/>
-              </a:spcBef>
-              <a:buClr>
-                <a:srgbClr val="000000"/>
-              </a:buClr>
-              <a:buSzPct val="45000"/>
-              <a:buFont typeface="Wingdings" charset="2"/>
-              <a:buChar char=""/>
-            </a:pPr>
-            <a:r>
-              <a:rPr b="0" lang="en-US" sz="3200" spc="-1" strike="noStrike">
-                <a:solidFill>
-                  <a:srgbClr val="222222"/>
-                </a:solidFill>
-                <a:latin typeface="Arial"/>
-              </a:rPr>
-              <a:t>Red (critical) rings the phone; orange (warn) arrives silently</a:t>
-            </a:r>
-            <a:endParaRPr b="0" lang="en-US" sz="3200" spc="-1" strike="noStrike">
-              <a:latin typeface="Arial"/>
-            </a:endParaRPr>
-          </a:p>
-          <a:p>
-            <a:pPr marL="432000" indent="-324000">
-              <a:spcBef>
-                <a:spcPts val="1417"/>
-              </a:spcBef>
-              <a:buClr>
-                <a:srgbClr val="000000"/>
-              </a:buClr>
-              <a:buSzPct val="45000"/>
-              <a:buFont typeface="Wingdings" charset="2"/>
-              <a:buChar char=""/>
-            </a:pPr>
-            <a:r>
-              <a:rPr b="0" lang="en-US" sz="3200" spc="-1" strike="noStrike">
-                <a:solidFill>
-                  <a:srgbClr val="222222"/>
-                </a:solidFill>
-                <a:latin typeface="Arial"/>
-              </a:rPr>
-              <a:t>First line: the level and the vault</a:t>
-            </a:r>
-            <a:endParaRPr b="0" lang="en-US" sz="3200" spc="-1" strike="noStrike">
-              <a:latin typeface="Arial"/>
-            </a:endParaRPr>
-          </a:p>
-          <a:p>
-            <a:pPr marL="432000" indent="-324000">
-              <a:spcBef>
-                <a:spcPts val="1417"/>
-              </a:spcBef>
-              <a:buClr>
-                <a:srgbClr val="000000"/>
-              </a:buClr>
-              <a:buSzPct val="45000"/>
-              <a:buFont typeface="Wingdings" charset="2"/>
-              <a:buChar char=""/>
-            </a:pPr>
-            <a:r>
-              <a:rPr b="0" lang="en-US" sz="3200" spc="-1" strike="noStrike">
-                <a:solidFill>
-                  <a:srgbClr val="222222"/>
-                </a:solidFill>
-                <a:latin typeface="Arial"/>
-              </a:rPr>
-              <a:t>Then what happened, the amounts, the block and a runbook link</a:t>
-            </a:r>
-            <a:endParaRPr b="0" lang="en-US" sz="3200" spc="-1" strike="noStrike">
-              <a:latin typeface="Arial"/>
-            </a:endParaRPr>
-          </a:p>
-          <a:p>
-            <a:pPr marL="432000" indent="-324000">
-              <a:spcBef>
-                <a:spcPts val="1417"/>
-              </a:spcBef>
-              <a:buClr>
-                <a:srgbClr val="000000"/>
-              </a:buClr>
-              <a:buSzPct val="45000"/>
-              <a:buFont typeface="Wingdings" charset="2"/>
-              <a:buChar char=""/>
-            </a:pPr>
-            <a:r>
-              <a:rPr b="0" lang="en-US" sz="3200" spc="-1" strike="noStrike">
-                <a:solidFill>
-                  <a:srgbClr val="222222"/>
-                </a:solidFill>
-                <a:latin typeface="Arial"/>
-              </a:rPr>
-              <a:t>Alerts of one block can arrive as one short summary</a:t>
-            </a:r>
-            <a:endParaRPr b="0" lang="en-US" sz="3200" spc="-1" strike="noStrike">
-              <a:latin typeface="Arial"/>
-            </a:endParaRPr>
-          </a:p>
-          <a:p>
-            <a:pPr marL="432000" indent="-324000">
-              <a:spcBef>
-                <a:spcPts val="1417"/>
-              </a:spcBef>
-              <a:buClr>
-                <a:srgbClr val="000000"/>
-              </a:buClr>
-              <a:buSzPct val="45000"/>
-              <a:buFont typeface="Wingdings" charset="2"/>
-              <a:buChar char=""/>
-            </a:pPr>
-            <a:r>
-              <a:rPr b="0" lang="en-US" sz="3200" spc="-1" strike="noStrike">
-                <a:solidFill>
-                  <a:srgbClr val="222222"/>
-                </a:solidFill>
-                <a:latin typeface="Arial"/>
-              </a:rPr>
-              <a:t>On the fork, the Etherscan link finds nothing: the transaction is local</a:t>
-            </a:r>
-            <a:endParaRPr b="0" lang="en-US" sz="3200" spc="-1" strike="noStrike">
-              <a:latin typeface="Arial"/>
-            </a:endParaRPr>
-          </a:p>
-        </p:txBody>
-      </p:sp>
-    </p:spTree>
-  </p:cSld>
-  <mc:AlternateContent>
-    <mc:Choice Requires="p14">
-      <p:transition spd="slow" p14:dur="2000"/>
-    </mc:Choice>
-    <mc:Fallback>
-      <p:transition spd="slow"/>
-    </mc:Fallback>
-  </mc:AlternateContent>
-</p:sld>
-</file>
-
-<file path=ppt/slides/slide13.xml><?xml version="1.0" encoding="utf-8"?>
-<p:sld xmlns:a="http://schemas.openxmlformats.org/drawingml/2006/main" xmlns:p="http://schemas.openxmlformats.org/presentationml/2006/main" xmlns:r="http://schemas.openxmlformats.org/officeDocument/2006/relationships" xmlns:p14="http://schemas.microsoft.com/office/powerpoint/2010/main" xmlns:p15="http://schemas.microsoft.com/office/powerpoint/2012/main" xmlns:mc="http://schemas.openxmlformats.org/markup-compatibility/2006">
-  <p:cSld>
-    <p:spTree>
-      <p:nvGrpSpPr>
-        <p:cNvPr id="1" name=""/>
-        <p:cNvGrpSpPr/>
-        <p:nvPr/>
-      </p:nvGrpSpPr>
-      <p:grpSpPr>
-        <a:xfrm>
-          <a:off x="0" y="0"/>
-          <a:ext cx="0" cy="0"/>
-          <a:chOff x="0" y="0"/>
-          <a:chExt cx="0" cy="0"/>
-        </a:xfrm>
-      </p:grpSpPr>
-      <p:sp>
-        <p:nvSpPr>
-          <p:cNvPr id="77" name="PlaceHolder 1"/>
-          <p:cNvSpPr>
-            <a:spLocks noGrp="1"/>
-          </p:cNvSpPr>
-          <p:nvPr>
-            <p:ph type="title"/>
-          </p:nvPr>
-        </p:nvSpPr>
-        <p:spPr>
-          <a:xfrm>
-            <a:off x="504000" y="226080"/>
-            <a:ext cx="9071640" cy="946440"/>
-          </a:xfrm>
-          <a:prstGeom prst="rect">
-            <a:avLst/>
-          </a:prstGeom>
-          <a:noFill/>
-          <a:ln w="0">
-            <a:noFill/>
-          </a:ln>
-        </p:spPr>
-        <p:txBody>
-          <a:bodyPr lIns="0" rIns="0" tIns="0" bIns="0" anchor="ctr">
-            <a:noAutofit/>
-          </a:bodyPr>
-          <a:p>
-            <a:pPr algn="ctr">
-              <a:buNone/>
-            </a:pPr>
-            <a:r>
-              <a:rPr b="0" lang="en-US" sz="4400" spc="-1" strike="noStrike">
-                <a:solidFill>
-                  <a:srgbClr val="1f4e79"/>
-                </a:solidFill>
-                <a:latin typeface="Arial"/>
-              </a:rPr>
-              <a:t>What to remember</a:t>
-            </a:r>
-            <a:endParaRPr b="0" lang="en-US" sz="4400" spc="-1" strike="noStrike">
-              <a:latin typeface="Arial"/>
-            </a:endParaRPr>
-          </a:p>
-        </p:txBody>
-      </p:sp>
-      <p:sp>
-        <p:nvSpPr>
-          <p:cNvPr id="78" name="PlaceHolder 2"/>
+          <p:cNvPr id="75" name="PlaceHolder 2"/>
           <p:cNvSpPr>
             <a:spLocks noGrp="1"/>
           </p:cNvSpPr>
@@ -5515,7 +4902,7 @@
         </p:spPr>
         <p:txBody>
           <a:bodyPr lIns="0" rIns="0" tIns="0" bIns="0" anchor="t">
-            <a:normAutofit fontScale="88000"/>
+            <a:normAutofit fontScale="83000"/>
           </a:bodyPr>
           <a:p>
             <a:pPr marL="432000" indent="-324000">
@@ -5561,7 +4948,7 @@
                 </a:solidFill>
                 <a:latin typeface="Arial"/>
               </a:rPr>
-              <a:t>If one link breaks: how much do I lose, and how fast?</a:t>
+              <a:t>When one link breaks: what does it do to my position, and how fast?</a:t>
             </a:r>
             <a:endParaRPr b="0" lang="en-US" sz="3200" spc="-1" strike="noStrike">
               <a:latin typeface="Arial"/>
@@ -6721,7 +6108,7 @@
                 </a:solidFill>
                 <a:latin typeface="Arial"/>
               </a:rPr>
-              <a:t>Act 1 · A forecast before the event</a:t>
+              <a:t>Act 1 · The price feed is rewritten</a:t>
             </a:r>
             <a:endParaRPr b="0" lang="en-US" sz="4400" spc="-1" strike="noStrike">
               <a:latin typeface="Arial"/>
@@ -6729,16 +6116,39 @@
           </a:p>
         </p:txBody>
       </p:sp>
-      <p:sp>
-        <p:nvSpPr>
-          <p:cNvPr id="60" name="Left5"/>
+      <p:pic>
+        <p:nvPicPr>
+          <p:cNvPr id="60" name="Image5" descr="act2-chain"/>
+          <p:cNvPicPr/>
+          <p:nvPr/>
+        </p:nvPicPr>
+        <p:blipFill>
+          <a:blip r:embed="rId1"/>
+          <a:stretch/>
+        </p:blipFill>
+        <p:spPr>
+          <a:xfrm>
+            <a:off x="900000" y="1224000"/>
+            <a:ext cx="8280000" cy="1864800"/>
+          </a:xfrm>
+          <a:prstGeom prst="rect">
+            <a:avLst/>
+          </a:prstGeom>
+          <a:ln w="0">
+            <a:noFill/>
+          </a:ln>
+        </p:spPr>
+      </p:pic>
+      <p:sp>
+        <p:nvSpPr>
+          <p:cNvPr id="61" name="Caption5"/>
           <p:cNvSpPr txBox="1"/>
           <p:nvPr/>
         </p:nvSpPr>
         <p:spPr>
           <a:xfrm>
-            <a:off x="504000" y="1296000"/>
-            <a:ext cx="4356000" cy="4086000"/>
+            <a:off x="576000" y="3196800"/>
+            <a:ext cx="9000000" cy="2347200"/>
           </a:xfrm>
           <a:prstGeom prst="rect">
             <a:avLst/>
@@ -6754,186 +6164,93 @@
           </a:bodyPr>
           <a:p>
             <a:r>
-              <a:rPr b="1" lang="en-US" sz="2000" spc="-1" strike="noStrike">
-                <a:solidFill>
-                  <a:srgbClr val="1f4e79"/>
-                </a:solidFill>
-                <a:latin typeface="Arial"/>
-              </a:rPr>
-              <a:t>What we ask</a:t>
-            </a:r>
-            <a:endParaRPr b="0" lang="en-US" sz="2000" spc="-1" strike="noStrike">
-              <a:latin typeface="Arial"/>
-            </a:endParaRPr>
-          </a:p>
-          <a:p>
-            <a:pPr marL="216000" indent="-216000">
-              <a:buClr>
-                <a:srgbClr val="000000"/>
-              </a:buClr>
-              <a:buSzPct val="45000"/>
-              <a:buFont typeface="Wingdings" charset="2"/>
-              <a:buChar char=""/>
-            </a:pPr>
-            <a:r>
-              <a:rPr b="0" lang="en-US" sz="2000" spc="-1" strike="noStrike">
+              <a:rPr b="0" lang="en-US" sz="2200" spc="-1" strike="noStrike">
                 <a:solidFill>
                   <a:srgbClr val="222222"/>
                 </a:solidFill>
                 <a:latin typeface="Arial"/>
               </a:rPr>
-              <a:t>What if strUSD lost 32 % of its value?</a:t>
-            </a:r>
-            <a:endParaRPr b="0" lang="en-US" sz="2000" spc="-1" strike="noStrike">
-              <a:latin typeface="Arial"/>
-            </a:endParaRPr>
-          </a:p>
-          <a:p>
-            <a:pPr marL="216000" indent="-216000">
-              <a:buClr>
-                <a:srgbClr val="000000"/>
-              </a:buClr>
-              <a:buSzPct val="45000"/>
-              <a:buFont typeface="Wingdings" charset="2"/>
-              <a:buChar char=""/>
-            </a:pPr>
-            <a:r>
-              <a:rPr b="0" lang="en-US" sz="2000" spc="-1" strike="noStrike">
+              <a:t>• </a:t>
+            </a:r>
+            <a:r>
+              <a:rPr b="0" lang="en-US" sz="2200" spc="-1" strike="noStrike">
                 <a:solidFill>
                   <a:srgbClr val="222222"/>
                 </a:solidFill>
                 <a:latin typeface="Arial"/>
               </a:rPr>
-              <a:t>Computed from recorded vaults, offline</a:t>
-            </a:r>
-            <a:endParaRPr b="0" lang="en-US" sz="2000" spc="-1" strike="noStrike">
-              <a:latin typeface="Arial"/>
-            </a:endParaRPr>
-          </a:p>
-          <a:p>
-            <a:pPr marL="216000" indent="-216000">
-              <a:buClr>
-                <a:srgbClr val="000000"/>
-              </a:buClr>
-              <a:buSzPct val="45000"/>
-              <a:buFont typeface="Wingdings" charset="2"/>
-              <a:buChar char=""/>
-            </a:pPr>
-            <a:r>
-              <a:rPr b="0" lang="en-US" sz="2000" spc="-1" strike="noStrike">
+              <a:t>RedStone's multisig swaps the code of the strUSD price feed</a:t>
+            </a:r>
+            <a:endParaRPr b="0" lang="en-US" sz="2200" spc="-1" strike="noStrike">
+              <a:latin typeface="Arial"/>
+            </a:endParaRPr>
+          </a:p>
+          <a:p>
+            <a:r>
+              <a:rPr b="0" lang="en-US" sz="2200" spc="-1" strike="noStrike">
                 <a:solidFill>
                   <a:srgbClr val="222222"/>
                 </a:solidFill>
                 <a:latin typeface="Arial"/>
               </a:rPr>
-              <a:t>Before anything happens on the fork</a:t>
-            </a:r>
-            <a:endParaRPr b="0" lang="en-US" sz="2000" spc="-1" strike="noStrike">
-              <a:latin typeface="Arial"/>
-            </a:endParaRPr>
-          </a:p>
-        </p:txBody>
-      </p:sp>
-      <p:sp>
-        <p:nvSpPr>
-          <p:cNvPr id="61" name="Right5"/>
-          <p:cNvSpPr txBox="1"/>
-          <p:nvPr/>
-        </p:nvSpPr>
-        <p:spPr>
-          <a:xfrm>
-            <a:off x="5220000" y="1296000"/>
-            <a:ext cx="4356000" cy="4086000"/>
-          </a:xfrm>
-          <a:prstGeom prst="rect">
-            <a:avLst/>
-          </a:prstGeom>
-          <a:noFill/>
-          <a:ln w="0">
-            <a:noFill/>
-          </a:ln>
-        </p:spPr>
-        <p:txBody>
-          <a:bodyPr lIns="90000" rIns="90000" tIns="45000" bIns="45000" anchor="t">
-            <a:noAutofit/>
-          </a:bodyPr>
-          <a:p>
-            <a:r>
-              <a:rPr b="1" lang="en-US" sz="2000" spc="-1" strike="noStrike">
-                <a:solidFill>
-                  <a:srgbClr val="1f4e79"/>
-                </a:solidFill>
-                <a:latin typeface="Arial"/>
-              </a:rPr>
-              <a:t>What riskdep answers</a:t>
-            </a:r>
-            <a:endParaRPr b="0" lang="en-US" sz="2000" spc="-1" strike="noStrike">
-              <a:latin typeface="Arial"/>
-            </a:endParaRPr>
-          </a:p>
-          <a:p>
-            <a:pPr marL="216000" indent="-216000">
-              <a:buClr>
-                <a:srgbClr val="000000"/>
-              </a:buClr>
-              <a:buSzPct val="45000"/>
-              <a:buFont typeface="Wingdings" charset="2"/>
-              <a:buChar char=""/>
-            </a:pPr>
-            <a:r>
-              <a:rPr b="0" lang="en-US" sz="2000" spc="-1" strike="noStrike">
+              <a:t>• </a:t>
+            </a:r>
+            <a:r>
+              <a:rPr b="0" lang="en-US" sz="2200" spc="-1" strike="noStrike">
                 <a:solidFill>
                   <a:srgbClr val="222222"/>
                 </a:solidFill>
                 <a:latin typeface="Arial"/>
               </a:rPr>
-              <a:t>The book of 7 vaults loses 2.80M USD (2.8 %)</a:t>
-            </a:r>
-            <a:endParaRPr b="0" lang="en-US" sz="2000" spc="-1" strike="noStrike">
-              <a:latin typeface="Arial"/>
-            </a:endParaRPr>
-          </a:p>
-          <a:p>
-            <a:pPr marL="216000" indent="-216000">
-              <a:buClr>
-                <a:srgbClr val="000000"/>
-              </a:buClr>
-              <a:buSzPct val="45000"/>
-              <a:buFont typeface="Wingdings" charset="2"/>
-              <a:buChar char=""/>
-            </a:pPr>
-            <a:r>
-              <a:rPr b="0" lang="en-US" sz="2000" spc="-1" strike="noStrike">
+              <a:t>The new code says strUSD is worth 0.70 instead of 1.03</a:t>
+            </a:r>
+            <a:endParaRPr b="0" lang="en-US" sz="2200" spc="-1" strike="noStrike">
+              <a:latin typeface="Arial"/>
+            </a:endParaRPr>
+          </a:p>
+          <a:p>
+            <a:r>
+              <a:rPr b="0" lang="en-US" sz="2200" spc="-1" strike="noStrike">
                 <a:solidFill>
                   <a:srgbClr val="222222"/>
                 </a:solidFill>
                 <a:latin typeface="Arial"/>
               </a:rPr>
-              <a:t>Tori: 1.83M (13.5 %) · USDC Yield: 0.97M (5.3 %)</a:t>
-            </a:r>
-            <a:endParaRPr b="0" lang="en-US" sz="2000" spc="-1" strike="noStrike">
-              <a:latin typeface="Arial"/>
-            </a:endParaRPr>
-          </a:p>
-          <a:p>
-            <a:pPr marL="216000" indent="-216000">
-              <a:buClr>
-                <a:srgbClr val="000000"/>
-              </a:buClr>
-              <a:buSzPct val="45000"/>
-              <a:buFont typeface="Wingdings" charset="2"/>
-              <a:buChar char=""/>
-            </a:pPr>
-            <a:r>
-              <a:rPr b="0" lang="en-US" sz="2000" spc="-1" strike="noStrike">
+              <a:t>• </a:t>
+            </a:r>
+            <a:r>
+              <a:rPr b="0" lang="en-US" sz="2200" spc="-1" strike="noStrike">
                 <a:solidFill>
                   <a:srgbClr val="222222"/>
                 </a:solidFill>
                 <a:latin typeface="Arial"/>
               </a:rPr>
-              <a:t>Act first on Tori: leaving pays if the risk is above 4.9 % over 30 days</a:t>
-            </a:r>
-            <a:endParaRPr b="0" lang="en-US" sz="2000" spc="-1" strike="noStrike">
+              <a:t>Loans become bigger than their collateral: 1.90M USDC of bad debt</a:t>
+            </a:r>
+            <a:endParaRPr b="0" lang="en-US" sz="2200" spc="-1" strike="noStrike">
+              <a:latin typeface="Arial"/>
+            </a:endParaRPr>
+          </a:p>
+          <a:p>
+            <a:r>
+              <a:rPr b="0" lang="en-US" sz="2200" spc="-1" strike="noStrike">
+                <a:solidFill>
+                  <a:srgbClr val="222222"/>
+                </a:solidFill>
+                <a:latin typeface="Arial"/>
+              </a:rPr>
+              <a:t>• </a:t>
+            </a:r>
+            <a:r>
+              <a:rPr b="0" lang="en-US" sz="2200" spc="-1" strike="noStrike">
+                <a:solidFill>
+                  <a:srgbClr val="222222"/>
+                </a:solidFill>
+                <a:latin typeface="Arial"/>
+              </a:rPr>
+              <a:t>Until it is written off, whoever stays in the vault carries it</a:t>
+            </a:r>
+            <a:endParaRPr b="0" lang="en-US" sz="2200" spc="-1" strike="noStrike">
               <a:latin typeface="Arial"/>
             </a:endParaRPr>
           </a:p>
@@ -7007,223 +6324,7 @@
                 </a:solidFill>
                 <a:latin typeface="Arial"/>
               </a:rPr>
-              <a:t>Act 2 · The price feed is rewritten</a:t>
-            </a:r>
-            <a:endParaRPr b="0" lang="en-US" sz="4400" spc="-1" strike="noStrike">
-              <a:latin typeface="Arial"/>
-            </a:endParaRPr>
-          </a:p>
-        </p:txBody>
-      </p:sp>
-      <p:pic>
-        <p:nvPicPr>
-          <p:cNvPr id="63" name="Image6" descr="act2-chain"/>
-          <p:cNvPicPr/>
-          <p:nvPr/>
-        </p:nvPicPr>
-        <p:blipFill>
-          <a:blip r:embed="rId1"/>
-          <a:stretch/>
-        </p:blipFill>
-        <p:spPr>
-          <a:xfrm>
-            <a:off x="900000" y="1224000"/>
-            <a:ext cx="8280000" cy="1864800"/>
-          </a:xfrm>
-          <a:prstGeom prst="rect">
-            <a:avLst/>
-          </a:prstGeom>
-          <a:ln w="0">
-            <a:noFill/>
-          </a:ln>
-        </p:spPr>
-      </p:pic>
-      <p:sp>
-        <p:nvSpPr>
-          <p:cNvPr id="64" name="Caption6"/>
-          <p:cNvSpPr txBox="1"/>
-          <p:nvPr/>
-        </p:nvSpPr>
-        <p:spPr>
-          <a:xfrm>
-            <a:off x="576000" y="3196800"/>
-            <a:ext cx="9000000" cy="2347200"/>
-          </a:xfrm>
-          <a:prstGeom prst="rect">
-            <a:avLst/>
-          </a:prstGeom>
-          <a:noFill/>
-          <a:ln w="0">
-            <a:noFill/>
-          </a:ln>
-        </p:spPr>
-        <p:txBody>
-          <a:bodyPr lIns="90000" rIns="90000" tIns="45000" bIns="45000" anchor="t">
-            <a:noAutofit/>
-          </a:bodyPr>
-          <a:p>
-            <a:r>
-              <a:rPr b="0" lang="en-US" sz="2200" spc="-1" strike="noStrike">
-                <a:solidFill>
-                  <a:srgbClr val="222222"/>
-                </a:solidFill>
-                <a:latin typeface="Arial"/>
-              </a:rPr>
-              <a:t>• </a:t>
-            </a:r>
-            <a:r>
-              <a:rPr b="0" lang="en-US" sz="2200" spc="-1" strike="noStrike">
-                <a:solidFill>
-                  <a:srgbClr val="222222"/>
-                </a:solidFill>
-                <a:latin typeface="Arial"/>
-              </a:rPr>
-              <a:t>RedStone's multisig swaps the code of the strUSD price feed</a:t>
-            </a:r>
-            <a:endParaRPr b="0" lang="en-US" sz="2200" spc="-1" strike="noStrike">
-              <a:latin typeface="Arial"/>
-            </a:endParaRPr>
-          </a:p>
-          <a:p>
-            <a:r>
-              <a:rPr b="0" lang="en-US" sz="2200" spc="-1" strike="noStrike">
-                <a:solidFill>
-                  <a:srgbClr val="222222"/>
-                </a:solidFill>
-                <a:latin typeface="Arial"/>
-              </a:rPr>
-              <a:t>• </a:t>
-            </a:r>
-            <a:r>
-              <a:rPr b="0" lang="en-US" sz="2200" spc="-1" strike="noStrike">
-                <a:solidFill>
-                  <a:srgbClr val="222222"/>
-                </a:solidFill>
-                <a:latin typeface="Arial"/>
-              </a:rPr>
-              <a:t>The new code says strUSD is worth 0.70 instead of 1.03</a:t>
-            </a:r>
-            <a:endParaRPr b="0" lang="en-US" sz="2200" spc="-1" strike="noStrike">
-              <a:latin typeface="Arial"/>
-            </a:endParaRPr>
-          </a:p>
-          <a:p>
-            <a:r>
-              <a:rPr b="0" lang="en-US" sz="2200" spc="-1" strike="noStrike">
-                <a:solidFill>
-                  <a:srgbClr val="222222"/>
-                </a:solidFill>
-                <a:latin typeface="Arial"/>
-              </a:rPr>
-              <a:t>• </a:t>
-            </a:r>
-            <a:r>
-              <a:rPr b="0" lang="en-US" sz="2200" spc="-1" strike="noStrike">
-                <a:solidFill>
-                  <a:srgbClr val="222222"/>
-                </a:solidFill>
-                <a:latin typeface="Arial"/>
-              </a:rPr>
-              <a:t>Loans become bigger than their collateral: 1.90M USDC of bad debt</a:t>
-            </a:r>
-            <a:endParaRPr b="0" lang="en-US" sz="2200" spc="-1" strike="noStrike">
-              <a:latin typeface="Arial"/>
-            </a:endParaRPr>
-          </a:p>
-          <a:p>
-            <a:r>
-              <a:rPr b="0" lang="en-US" sz="2200" spc="-1" strike="noStrike">
-                <a:solidFill>
-                  <a:srgbClr val="222222"/>
-                </a:solidFill>
-                <a:latin typeface="Arial"/>
-              </a:rPr>
-              <a:t>• </a:t>
-            </a:r>
-            <a:r>
-              <a:rPr b="0" lang="en-US" sz="2200" spc="-1" strike="noStrike">
-                <a:solidFill>
-                  <a:srgbClr val="222222"/>
-                </a:solidFill>
-                <a:latin typeface="Arial"/>
-              </a:rPr>
-              <a:t>Until it is written off, whoever stays in the vault carries it</a:t>
-            </a:r>
-            <a:endParaRPr b="0" lang="en-US" sz="2200" spc="-1" strike="noStrike">
-              <a:latin typeface="Arial"/>
-            </a:endParaRPr>
-          </a:p>
-        </p:txBody>
-      </p:sp>
-    </p:spTree>
-  </p:cSld>
-  <mc:AlternateContent>
-    <mc:Choice Requires="p14">
-      <p:transition spd="slow" p14:dur="2000"/>
-    </mc:Choice>
-    <mc:Fallback>
-      <p:transition spd="slow"/>
-    </mc:Fallback>
-  </mc:AlternateContent>
-</p:sld>
-</file>
-
-<file path=ppt/slides/slide8.xml><?xml version="1.0" encoding="utf-8"?>
-<p:sld xmlns:a="http://schemas.openxmlformats.org/drawingml/2006/main" xmlns:p="http://schemas.openxmlformats.org/presentationml/2006/main" xmlns:r="http://schemas.openxmlformats.org/officeDocument/2006/relationships" xmlns:p14="http://schemas.microsoft.com/office/powerpoint/2010/main" xmlns:p15="http://schemas.microsoft.com/office/powerpoint/2012/main" xmlns:mc="http://schemas.openxmlformats.org/markup-compatibility/2006">
-  <p:cSld>
-    <p:spTree>
-      <p:nvGrpSpPr>
-        <p:cNvPr id="1" name=""/>
-        <p:cNvGrpSpPr/>
-        <p:nvPr/>
-      </p:nvGrpSpPr>
-      <p:grpSpPr>
-        <a:xfrm>
-          <a:off x="0" y="0"/>
-          <a:ext cx="0" cy="0"/>
-          <a:chOff x="0" y="0"/>
-          <a:chExt cx="0" cy="0"/>
-        </a:xfrm>
-      </p:grpSpPr>
-      <p:sp>
-        <p:nvSpPr>
-          <p:cNvPr id="65" name="PlaceHolder 1"/>
-          <p:cNvSpPr>
-            <a:spLocks noGrp="1"/>
-          </p:cNvSpPr>
-          <p:nvPr>
-            <p:ph type="title"/>
-          </p:nvPr>
-        </p:nvSpPr>
-        <p:spPr>
-          <a:xfrm>
-            <a:off x="504000" y="226080"/>
-            <a:ext cx="9071640" cy="946440"/>
-          </a:xfrm>
-          <a:prstGeom prst="rect">
-            <a:avLst/>
-          </a:prstGeom>
-          <a:noFill/>
-          <a:ln w="0">
-            <a:noFill/>
-          </a:ln>
-        </p:spPr>
-        <p:txBody>
-          <a:bodyPr lIns="0" rIns="0" tIns="0" bIns="0" anchor="ctr">
-            <a:noAutofit/>
-          </a:bodyPr>
-          <a:p>
-            <a:pPr algn="ctr">
-              <a:buNone/>
-            </a:pPr>
-            <a:r>
-              <a:rPr b="0" lang="en-US" sz="4400" spc="-1" strike="noStrike">
-                <a:solidFill>
-                  <a:srgbClr val="1f4e79"/>
-                </a:solidFill>
-                <a:latin typeface="Arial"/>
-              </a:rPr>
-              <a:t>Act 2 · What riskdep said</a:t>
+              <a:t>Act 1 · What riskdep said</a:t>
             </a:r>
             <a:endParaRPr b="0" lang="en-US" sz="4400" spc="-1" strike="noStrike">
               <a:latin typeface="Arial"/>
@@ -7233,7 +6334,7 @@
       </p:sp>
       <p:graphicFrame>
         <p:nvGraphicFramePr>
-          <p:cNvPr id="66" name="Table7"/>
+          <p:cNvPr id="63" name="Table6"/>
           <p:cNvGraphicFramePr/>
           <p:nvPr/>
         </p:nvGraphicFramePr>
@@ -8016,6 +7117,270 @@
 </p:sld>
 </file>
 
+<file path=ppt/slides/slide8.xml><?xml version="1.0" encoding="utf-8"?>
+<p:sld xmlns:a="http://schemas.openxmlformats.org/drawingml/2006/main" xmlns:p="http://schemas.openxmlformats.org/presentationml/2006/main" xmlns:r="http://schemas.openxmlformats.org/officeDocument/2006/relationships" xmlns:p14="http://schemas.microsoft.com/office/powerpoint/2010/main" xmlns:p15="http://schemas.microsoft.com/office/powerpoint/2012/main" xmlns:mc="http://schemas.openxmlformats.org/markup-compatibility/2006">
+  <p:cSld>
+    <p:spTree>
+      <p:nvGrpSpPr>
+        <p:cNvPr id="1" name=""/>
+        <p:cNvGrpSpPr/>
+        <p:nvPr/>
+      </p:nvGrpSpPr>
+      <p:grpSpPr>
+        <a:xfrm>
+          <a:off x="0" y="0"/>
+          <a:ext cx="0" cy="0"/>
+          <a:chOff x="0" y="0"/>
+          <a:chExt cx="0" cy="0"/>
+        </a:xfrm>
+      </p:grpSpPr>
+      <p:sp>
+        <p:nvSpPr>
+          <p:cNvPr id="64" name="PlaceHolder 1"/>
+          <p:cNvSpPr>
+            <a:spLocks noGrp="1"/>
+          </p:cNvSpPr>
+          <p:nvPr>
+            <p:ph type="title"/>
+          </p:nvPr>
+        </p:nvSpPr>
+        <p:spPr>
+          <a:xfrm>
+            <a:off x="504000" y="226080"/>
+            <a:ext cx="9071640" cy="946440"/>
+          </a:xfrm>
+          <a:prstGeom prst="rect">
+            <a:avLst/>
+          </a:prstGeom>
+          <a:noFill/>
+          <a:ln w="0">
+            <a:noFill/>
+          </a:ln>
+        </p:spPr>
+        <p:txBody>
+          <a:bodyPr lIns="0" rIns="0" tIns="0" bIns="0" anchor="ctr">
+            <a:noAutofit/>
+          </a:bodyPr>
+          <a:p>
+            <a:pPr algn="ctr">
+              <a:buNone/>
+            </a:pPr>
+            <a:r>
+              <a:rPr b="0" lang="en-US" sz="4400" spc="-1" strike="noStrike">
+                <a:solidFill>
+                  <a:srgbClr val="1f4e79"/>
+                </a:solidFill>
+                <a:latin typeface="Arial"/>
+              </a:rPr>
+              <a:t>Act 1 · Stay or exit?</a:t>
+            </a:r>
+            <a:endParaRPr b="0" lang="en-US" sz="4400" spc="-1" strike="noStrike">
+              <a:latin typeface="Arial"/>
+            </a:endParaRPr>
+          </a:p>
+        </p:txBody>
+      </p:sp>
+      <p:sp>
+        <p:nvSpPr>
+          <p:cNvPr id="65" name="Left7"/>
+          <p:cNvSpPr txBox="1"/>
+          <p:nvPr/>
+        </p:nvSpPr>
+        <p:spPr>
+          <a:xfrm>
+            <a:off x="504000" y="1296000"/>
+            <a:ext cx="4356000" cy="4086000"/>
+          </a:xfrm>
+          <a:prstGeom prst="rect">
+            <a:avLst/>
+          </a:prstGeom>
+          <a:noFill/>
+          <a:ln w="0">
+            <a:noFill/>
+          </a:ln>
+        </p:spPr>
+        <p:txBody>
+          <a:bodyPr lIns="90000" rIns="90000" tIns="45000" bIns="45000" anchor="t">
+            <a:noAutofit/>
+          </a:bodyPr>
+          <a:p>
+            <a:r>
+              <a:rPr b="1" lang="en-US" sz="2000" spc="-1" strike="noStrike">
+                <a:solidFill>
+                  <a:srgbClr val="1f4e79"/>
+                </a:solidFill>
+                <a:latin typeface="Arial"/>
+              </a:rPr>
+              <a:t>Stay</a:t>
+            </a:r>
+            <a:endParaRPr b="0" lang="en-US" sz="2000" spc="-1" strike="noStrike">
+              <a:latin typeface="Arial"/>
+            </a:endParaRPr>
+          </a:p>
+          <a:p>
+            <a:pPr marL="216000" indent="-216000">
+              <a:buClr>
+                <a:srgbClr val="000000"/>
+              </a:buClr>
+              <a:buSzPct val="45000"/>
+              <a:buFont typeface="Wingdings" charset="2"/>
+              <a:buChar char=""/>
+            </a:pPr>
+            <a:r>
+              <a:rPr b="0" lang="en-US" sz="2000" spc="-1" strike="noStrike">
+                <a:solidFill>
+                  <a:srgbClr val="222222"/>
+                </a:solidFill>
+                <a:latin typeface="Arial"/>
+              </a:rPr>
+              <a:t>Loses 454,103 USDC: its share of the bad debt</a:t>
+            </a:r>
+            <a:endParaRPr b="0" lang="en-US" sz="2000" spc="-1" strike="noStrike">
+              <a:latin typeface="Arial"/>
+            </a:endParaRPr>
+          </a:p>
+          <a:p>
+            <a:pPr marL="216000" indent="-216000">
+              <a:buClr>
+                <a:srgbClr val="000000"/>
+              </a:buClr>
+              <a:buSzPct val="45000"/>
+              <a:buFont typeface="Wingdings" charset="2"/>
+              <a:buChar char=""/>
+            </a:pPr>
+            <a:r>
+              <a:rPr b="0" lang="en-US" sz="2000" spc="-1" strike="noStrike">
+                <a:solidFill>
+                  <a:srgbClr val="222222"/>
+                </a:solidFill>
+                <a:latin typeface="Arial"/>
+              </a:rPr>
+              <a:t>Waits for the debt to be written off</a:t>
+            </a:r>
+            <a:endParaRPr b="0" lang="en-US" sz="2000" spc="-1" strike="noStrike">
+              <a:latin typeface="Arial"/>
+            </a:endParaRPr>
+          </a:p>
+        </p:txBody>
+      </p:sp>
+      <p:sp>
+        <p:nvSpPr>
+          <p:cNvPr id="66" name="Right7"/>
+          <p:cNvSpPr txBox="1"/>
+          <p:nvPr/>
+        </p:nvSpPr>
+        <p:spPr>
+          <a:xfrm>
+            <a:off x="5220000" y="1296000"/>
+            <a:ext cx="4356000" cy="4086000"/>
+          </a:xfrm>
+          <a:prstGeom prst="rect">
+            <a:avLst/>
+          </a:prstGeom>
+          <a:noFill/>
+          <a:ln w="0">
+            <a:noFill/>
+          </a:ln>
+        </p:spPr>
+        <p:txBody>
+          <a:bodyPr lIns="90000" rIns="90000" tIns="45000" bIns="45000" anchor="t">
+            <a:noAutofit/>
+          </a:bodyPr>
+          <a:p>
+            <a:r>
+              <a:rPr b="1" lang="en-US" sz="2000" spc="-1" strike="noStrike">
+                <a:solidFill>
+                  <a:srgbClr val="1f4e79"/>
+                </a:solidFill>
+                <a:latin typeface="Arial"/>
+              </a:rPr>
+              <a:t>Exit now: riskdep's verdict</a:t>
+            </a:r>
+            <a:endParaRPr b="0" lang="en-US" sz="2000" spc="-1" strike="noStrike">
+              <a:latin typeface="Arial"/>
+            </a:endParaRPr>
+          </a:p>
+          <a:p>
+            <a:pPr marL="216000" indent="-216000">
+              <a:buClr>
+                <a:srgbClr val="000000"/>
+              </a:buClr>
+              <a:buSzPct val="45000"/>
+              <a:buFont typeface="Wingdings" charset="2"/>
+              <a:buChar char=""/>
+            </a:pPr>
+            <a:r>
+              <a:rPr b="0" lang="en-US" sz="2000" spc="-1" strike="noStrike">
+                <a:solidFill>
+                  <a:srgbClr val="222222"/>
+                </a:solidFill>
+                <a:latin typeface="Arial"/>
+              </a:rPr>
+              <a:t>2,374,262 USDC can leave at full value</a:t>
+            </a:r>
+            <a:endParaRPr b="0" lang="en-US" sz="2000" spc="-1" strike="noStrike">
+              <a:latin typeface="Arial"/>
+            </a:endParaRPr>
+          </a:p>
+          <a:p>
+            <a:pPr marL="216000" indent="-216000">
+              <a:buClr>
+                <a:srgbClr val="000000"/>
+              </a:buClr>
+              <a:buSzPct val="45000"/>
+              <a:buFont typeface="Wingdings" charset="2"/>
+              <a:buChar char=""/>
+            </a:pPr>
+            <a:r>
+              <a:rPr b="0" lang="en-US" sz="2000" spc="-1" strike="noStrike">
+                <a:solidFill>
+                  <a:srgbClr val="222222"/>
+                </a:solidFill>
+                <a:latin typeface="Arial"/>
+              </a:rPr>
+              <a:t>The loss falls to 293,378 USDC</a:t>
+            </a:r>
+            <a:endParaRPr b="0" lang="en-US" sz="2000" spc="-1" strike="noStrike">
+              <a:latin typeface="Arial"/>
+            </a:endParaRPr>
+          </a:p>
+          <a:p>
+            <a:pPr marL="216000" indent="-216000">
+              <a:buClr>
+                <a:srgbClr val="000000"/>
+              </a:buClr>
+              <a:buSzPct val="45000"/>
+              <a:buFont typeface="Wingdings" charset="2"/>
+              <a:buChar char=""/>
+            </a:pPr>
+            <a:r>
+              <a:rPr b="0" lang="en-US" sz="2000" spc="-1" strike="noStrike">
+                <a:solidFill>
+                  <a:srgbClr val="222222"/>
+                </a:solidFill>
+                <a:latin typeface="Arial"/>
+              </a:rPr>
+              <a:t>2,620,422 USDC cannot leave yet</a:t>
+            </a:r>
+            <a:endParaRPr b="0" lang="en-US" sz="2000" spc="-1" strike="noStrike">
+              <a:latin typeface="Arial"/>
+            </a:endParaRPr>
+          </a:p>
+        </p:txBody>
+      </p:sp>
+    </p:spTree>
+  </p:cSld>
+  <mc:AlternateContent>
+    <mc:Choice Requires="p14">
+      <p:transition spd="slow" p14:dur="2000"/>
+    </mc:Choice>
+    <mc:Fallback>
+      <p:transition spd="slow"/>
+    </mc:Fallback>
+  </mc:AlternateContent>
+</p:sld>
+</file>
+
 <file path=ppt/slides/slide9.xml><?xml version="1.0" encoding="utf-8"?>
 <p:sld xmlns:a="http://schemas.openxmlformats.org/drawingml/2006/main" xmlns:p="http://schemas.openxmlformats.org/presentationml/2006/main" xmlns:r="http://schemas.openxmlformats.org/officeDocument/2006/relationships" xmlns:p14="http://schemas.microsoft.com/office/powerpoint/2010/main" xmlns:p15="http://schemas.microsoft.com/office/powerpoint/2012/main" xmlns:mc="http://schemas.openxmlformats.org/markup-compatibility/2006">
   <p:cSld>
@@ -8071,7 +7436,7 @@
                 </a:solidFill>
                 <a:latin typeface="Arial"/>
               </a:rPr>
-              <a:t>Act 2 · Stay or exit?</a:t>
+              <a:t>Is this a hack?</a:t>
             </a:r>
             <a:endParaRPr b="0" lang="en-US" sz="4400" spc="-1" strike="noStrike">
               <a:latin typeface="Arial"/>
@@ -8079,194 +7444,457 @@
           </a:p>
         </p:txBody>
       </p:sp>
-      <p:sp>
-        <p:nvSpPr>
-          <p:cNvPr id="68" name="Left8"/>
-          <p:cNvSpPr txBox="1"/>
+      <p:graphicFrame>
+        <p:nvGraphicFramePr>
+          <p:cNvPr id="68" name="Table8"/>
+          <p:cNvGraphicFramePr/>
           <p:nvPr/>
-        </p:nvSpPr>
-        <p:spPr>
-          <a:xfrm>
-            <a:off x="504000" y="1296000"/>
-            <a:ext cx="4356000" cy="4086000"/>
-          </a:xfrm>
-          <a:prstGeom prst="rect">
-            <a:avLst/>
-          </a:prstGeom>
-          <a:noFill/>
-          <a:ln w="0">
-            <a:noFill/>
-          </a:ln>
-        </p:spPr>
-        <p:txBody>
-          <a:bodyPr lIns="90000" rIns="90000" tIns="45000" bIns="45000" anchor="t">
-            <a:noAutofit/>
-          </a:bodyPr>
-          <a:p>
-            <a:r>
-              <a:rPr b="1" lang="en-US" sz="2000" spc="-1" strike="noStrike">
-                <a:solidFill>
-                  <a:srgbClr val="1f4e79"/>
-                </a:solidFill>
-                <a:latin typeface="Arial"/>
-              </a:rPr>
-              <a:t>Stay</a:t>
-            </a:r>
-            <a:endParaRPr b="0" lang="en-US" sz="2000" spc="-1" strike="noStrike">
-              <a:latin typeface="Arial"/>
-            </a:endParaRPr>
-          </a:p>
-          <a:p>
-            <a:pPr marL="216000" indent="-216000">
-              <a:buClr>
-                <a:srgbClr val="000000"/>
-              </a:buClr>
-              <a:buSzPct val="45000"/>
-              <a:buFont typeface="Wingdings" charset="2"/>
-              <a:buChar char=""/>
-            </a:pPr>
-            <a:r>
-              <a:rPr b="0" lang="en-US" sz="2000" spc="-1" strike="noStrike">
-                <a:solidFill>
-                  <a:srgbClr val="222222"/>
-                </a:solidFill>
-                <a:latin typeface="Arial"/>
-              </a:rPr>
-              <a:t>Loses 454,103 USDC: its share of the bad debt</a:t>
-            </a:r>
-            <a:endParaRPr b="0" lang="en-US" sz="2000" spc="-1" strike="noStrike">
-              <a:latin typeface="Arial"/>
-            </a:endParaRPr>
-          </a:p>
-          <a:p>
-            <a:pPr marL="216000" indent="-216000">
-              <a:buClr>
-                <a:srgbClr val="000000"/>
-              </a:buClr>
-              <a:buSzPct val="45000"/>
-              <a:buFont typeface="Wingdings" charset="2"/>
-              <a:buChar char=""/>
-            </a:pPr>
-            <a:r>
-              <a:rPr b="0" lang="en-US" sz="2000" spc="-1" strike="noStrike">
-                <a:solidFill>
-                  <a:srgbClr val="222222"/>
-                </a:solidFill>
-                <a:latin typeface="Arial"/>
-              </a:rPr>
-              <a:t>Waits for the debt to be written off</a:t>
-            </a:r>
-            <a:endParaRPr b="0" lang="en-US" sz="2000" spc="-1" strike="noStrike">
-              <a:latin typeface="Arial"/>
-            </a:endParaRPr>
-          </a:p>
-        </p:txBody>
-      </p:sp>
-      <p:sp>
-        <p:nvSpPr>
-          <p:cNvPr id="69" name="Right8"/>
-          <p:cNvSpPr txBox="1"/>
-          <p:nvPr/>
-        </p:nvSpPr>
-        <p:spPr>
-          <a:xfrm>
-            <a:off x="5220000" y="1296000"/>
-            <a:ext cx="4356000" cy="4086000"/>
-          </a:xfrm>
-          <a:prstGeom prst="rect">
-            <a:avLst/>
-          </a:prstGeom>
-          <a:noFill/>
-          <a:ln w="0">
-            <a:noFill/>
-          </a:ln>
-        </p:spPr>
-        <p:txBody>
-          <a:bodyPr lIns="90000" rIns="90000" tIns="45000" bIns="45000" anchor="t">
-            <a:noAutofit/>
-          </a:bodyPr>
-          <a:p>
-            <a:r>
-              <a:rPr b="1" lang="en-US" sz="2000" spc="-1" strike="noStrike">
-                <a:solidFill>
-                  <a:srgbClr val="1f4e79"/>
-                </a:solidFill>
-                <a:latin typeface="Arial"/>
-              </a:rPr>
-              <a:t>Exit now: riskdep's verdict</a:t>
-            </a:r>
-            <a:endParaRPr b="0" lang="en-US" sz="2000" spc="-1" strike="noStrike">
-              <a:latin typeface="Arial"/>
-            </a:endParaRPr>
-          </a:p>
-          <a:p>
-            <a:pPr marL="216000" indent="-216000">
-              <a:buClr>
-                <a:srgbClr val="000000"/>
-              </a:buClr>
-              <a:buSzPct val="45000"/>
-              <a:buFont typeface="Wingdings" charset="2"/>
-              <a:buChar char=""/>
-            </a:pPr>
-            <a:r>
-              <a:rPr b="0" lang="en-US" sz="2000" spc="-1" strike="noStrike">
-                <a:solidFill>
-                  <a:srgbClr val="222222"/>
-                </a:solidFill>
-                <a:latin typeface="Arial"/>
-              </a:rPr>
-              <a:t>2,374,262 USDC can leave at full value</a:t>
-            </a:r>
-            <a:endParaRPr b="0" lang="en-US" sz="2000" spc="-1" strike="noStrike">
-              <a:latin typeface="Arial"/>
-            </a:endParaRPr>
-          </a:p>
-          <a:p>
-            <a:pPr marL="216000" indent="-216000">
-              <a:buClr>
-                <a:srgbClr val="000000"/>
-              </a:buClr>
-              <a:buSzPct val="45000"/>
-              <a:buFont typeface="Wingdings" charset="2"/>
-              <a:buChar char=""/>
-            </a:pPr>
-            <a:r>
-              <a:rPr b="0" lang="en-US" sz="2000" spc="-1" strike="noStrike">
-                <a:solidFill>
-                  <a:srgbClr val="222222"/>
-                </a:solidFill>
-                <a:latin typeface="Arial"/>
-              </a:rPr>
-              <a:t>The loss falls to 293,378 USDC</a:t>
-            </a:r>
-            <a:endParaRPr b="0" lang="en-US" sz="2000" spc="-1" strike="noStrike">
-              <a:latin typeface="Arial"/>
-            </a:endParaRPr>
-          </a:p>
-          <a:p>
-            <a:pPr marL="216000" indent="-216000">
-              <a:buClr>
-                <a:srgbClr val="000000"/>
-              </a:buClr>
-              <a:buSzPct val="45000"/>
-              <a:buFont typeface="Wingdings" charset="2"/>
-              <a:buChar char=""/>
-            </a:pPr>
-            <a:r>
-              <a:rPr b="0" lang="en-US" sz="2000" spc="-1" strike="noStrike">
-                <a:solidFill>
-                  <a:srgbClr val="222222"/>
-                </a:solidFill>
-                <a:latin typeface="Arial"/>
-              </a:rPr>
-              <a:t>2,620,422 USDC cannot leave yet</a:t>
-            </a:r>
-            <a:endParaRPr b="0" lang="en-US" sz="2000" spc="-1" strike="noStrike">
-              <a:latin typeface="Arial"/>
-            </a:endParaRPr>
-          </a:p>
-        </p:txBody>
-      </p:sp>
+        </p:nvGraphicFramePr>
+        <p:xfrm>
+          <a:off x="504000" y="1296000"/>
+          <a:ext cx="9071640" cy="2104200"/>
+        </p:xfrm>
+        <a:graphic>
+          <a:graphicData uri="http://schemas.openxmlformats.org/drawingml/2006/table">
+            <a:tbl>
+              <a:tblPr/>
+              <a:tblGrid>
+                <a:gridCol w="3024000"/>
+                <a:gridCol w="3024000"/>
+                <a:gridCol w="3024000"/>
+              </a:tblGrid>
+              <a:tr h="450000">
+                <a:tc>
+                  <a:txBody>
+                    <a:bodyPr lIns="90000" rIns="90000" tIns="45000" bIns="45000" anchor="t">
+                      <a:noAutofit/>
+                    </a:bodyPr>
+                    <a:p>
+                      <a:r>
+                        <a:rPr b="0" lang="en-US" sz="1800" spc="-1" strike="noStrike">
+                          <a:latin typeface="Arial"/>
+                        </a:rPr>
+                        <a:t>Who sends the upgrade</a:t>
+                      </a:r>
+                      <a:endParaRPr b="0" lang="en-US" sz="1800" spc="-1" strike="noStrike">
+                        <a:latin typeface="Arial"/>
+                      </a:endParaRPr>
+                    </a:p>
+                  </a:txBody>
+                  <a:tcPr anchor="t" marL="90000" marR="90000">
+                    <a:lnL>
+                      <a:noFill/>
+                    </a:lnL>
+                    <a:lnR>
+                      <a:noFill/>
+                    </a:lnR>
+                    <a:lnT>
+                      <a:noFill/>
+                    </a:lnT>
+                    <a:lnB>
+                      <a:noFill/>
+                    </a:lnB>
+                    <a:solidFill>
+                      <a:srgbClr val="729fcf"/>
+                    </a:solidFill>
+                  </a:tcPr>
+                </a:tc>
+                <a:tc>
+                  <a:txBody>
+                    <a:bodyPr lIns="90000" rIns="90000" tIns="45000" bIns="45000" anchor="t">
+                      <a:noAutofit/>
+                    </a:bodyPr>
+                    <a:p>
+                      <a:r>
+                        <a:rPr b="0" lang="en-US" sz="1800" spc="-1" strike="noStrike">
+                          <a:latin typeface="Arial"/>
+                        </a:rPr>
+                        <a:t>What it is</a:t>
+                      </a:r>
+                      <a:endParaRPr b="0" lang="en-US" sz="1800" spc="-1" strike="noStrike">
+                        <a:latin typeface="Arial"/>
+                      </a:endParaRPr>
+                    </a:p>
+                  </a:txBody>
+                  <a:tcPr anchor="t" marL="90000" marR="90000">
+                    <a:lnL>
+                      <a:noFill/>
+                    </a:lnL>
+                    <a:lnR>
+                      <a:noFill/>
+                    </a:lnR>
+                    <a:lnT>
+                      <a:noFill/>
+                    </a:lnT>
+                    <a:lnB>
+                      <a:noFill/>
+                    </a:lnB>
+                    <a:solidFill>
+                      <a:srgbClr val="729fcf"/>
+                    </a:solidFill>
+                  </a:tcPr>
+                </a:tc>
+                <a:tc>
+                  <a:txBody>
+                    <a:bodyPr lIns="90000" rIns="90000" tIns="45000" bIns="45000" anchor="t">
+                      <a:noAutofit/>
+                    </a:bodyPr>
+                    <a:p>
+                      <a:r>
+                        <a:rPr b="0" lang="en-US" sz="1800" spc="-1" strike="noStrike">
+                          <a:latin typeface="Arial"/>
+                        </a:rPr>
+                        <a:t>Effect</a:t>
+                      </a:r>
+                      <a:endParaRPr b="0" lang="en-US" sz="1800" spc="-1" strike="noStrike">
+                        <a:latin typeface="Arial"/>
+                      </a:endParaRPr>
+                    </a:p>
+                  </a:txBody>
+                  <a:tcPr anchor="t" marL="90000" marR="90000">
+                    <a:lnL>
+                      <a:noFill/>
+                    </a:lnL>
+                    <a:lnR>
+                      <a:noFill/>
+                    </a:lnR>
+                    <a:lnT>
+                      <a:noFill/>
+                    </a:lnT>
+                    <a:lnB>
+                      <a:noFill/>
+                    </a:lnB>
+                    <a:solidFill>
+                      <a:srgbClr val="729fcf"/>
+                    </a:solidFill>
+                  </a:tcPr>
+                </a:tc>
+              </a:tr>
+              <a:tr h="450000">
+                <a:tc>
+                  <a:txBody>
+                    <a:bodyPr lIns="90000" rIns="90000" tIns="45000" bIns="45000" anchor="t">
+                      <a:noAutofit/>
+                    </a:bodyPr>
+                    <a:p>
+                      <a:r>
+                        <a:rPr b="0" lang="en-US" sz="1800" spc="-1" strike="noStrike">
+                          <a:latin typeface="Arial"/>
+                        </a:rPr>
+                        <a:t>Someone with 2 stolen keys</a:t>
+                      </a:r>
+                      <a:endParaRPr b="0" lang="en-US" sz="1800" spc="-1" strike="noStrike">
+                        <a:latin typeface="Arial"/>
+                      </a:endParaRPr>
+                    </a:p>
+                  </a:txBody>
+                  <a:tcPr anchor="t" marL="90000" marR="90000">
+                    <a:lnL>
+                      <a:noFill/>
+                    </a:lnL>
+                    <a:lnR>
+                      <a:noFill/>
+                    </a:lnR>
+                    <a:lnT>
+                      <a:noFill/>
+                    </a:lnT>
+                    <a:lnB>
+                      <a:noFill/>
+                    </a:lnB>
+                    <a:solidFill>
+                      <a:srgbClr val="729fcf"/>
+                    </a:solidFill>
+                  </a:tcPr>
+                </a:tc>
+                <a:tc>
+                  <a:txBody>
+                    <a:bodyPr lIns="90000" rIns="90000" tIns="45000" bIns="45000" anchor="t">
+                      <a:noAutofit/>
+                    </a:bodyPr>
+                    <a:p>
+                      <a:r>
+                        <a:rPr b="0" lang="en-US" sz="1800" spc="-1" strike="noStrike">
+                          <a:latin typeface="Arial"/>
+                        </a:rPr>
+                        <a:t>A hack</a:t>
+                      </a:r>
+                      <a:endParaRPr b="0" lang="en-US" sz="1800" spc="-1" strike="noStrike">
+                        <a:latin typeface="Arial"/>
+                      </a:endParaRPr>
+                    </a:p>
+                  </a:txBody>
+                  <a:tcPr anchor="t" marL="90000" marR="90000">
+                    <a:lnL>
+                      <a:noFill/>
+                    </a:lnL>
+                    <a:lnR>
+                      <a:noFill/>
+                    </a:lnR>
+                    <a:lnT>
+                      <a:noFill/>
+                    </a:lnT>
+                    <a:lnB>
+                      <a:noFill/>
+                    </a:lnB>
+                    <a:solidFill>
+                      <a:srgbClr val="729fcf"/>
+                    </a:solidFill>
+                  </a:tcPr>
+                </a:tc>
+                <a:tc>
+                  <a:txBody>
+                    <a:bodyPr lIns="90000" rIns="90000" tIns="45000" bIns="45000" anchor="t">
+                      <a:noAutofit/>
+                    </a:bodyPr>
+                    <a:p>
+                      <a:r>
+                        <a:rPr b="0" lang="en-US" sz="1800" spc="-1" strike="noStrike">
+                          <a:latin typeface="Arial"/>
+                        </a:rPr>
+                        <a:t>Price set by the attacker</a:t>
+                      </a:r>
+                      <a:endParaRPr b="0" lang="en-US" sz="1800" spc="-1" strike="noStrike">
+                        <a:latin typeface="Arial"/>
+                      </a:endParaRPr>
+                    </a:p>
+                  </a:txBody>
+                  <a:tcPr anchor="t" marL="90000" marR="90000">
+                    <a:lnL>
+                      <a:noFill/>
+                    </a:lnL>
+                    <a:lnR>
+                      <a:noFill/>
+                    </a:lnR>
+                    <a:lnT>
+                      <a:noFill/>
+                    </a:lnT>
+                    <a:lnB>
+                      <a:noFill/>
+                    </a:lnB>
+                    <a:solidFill>
+                      <a:srgbClr val="729fcf"/>
+                    </a:solidFill>
+                  </a:tcPr>
+                </a:tc>
+              </a:tr>
+              <a:tr h="450000">
+                <a:tc>
+                  <a:txBody>
+                    <a:bodyPr lIns="90000" rIns="90000" tIns="45000" bIns="45000" anchor="t">
+                      <a:noAutofit/>
+                    </a:bodyPr>
+                    <a:p>
+                      <a:r>
+                        <a:rPr b="0" lang="en-US" sz="1800" spc="-1" strike="noStrike">
+                          <a:latin typeface="Arial"/>
+                        </a:rPr>
+                        <a:t>The real signers, by mistake</a:t>
+                      </a:r>
+                      <a:endParaRPr b="0" lang="en-US" sz="1800" spc="-1" strike="noStrike">
+                        <a:latin typeface="Arial"/>
+                      </a:endParaRPr>
+                    </a:p>
+                  </a:txBody>
+                  <a:tcPr anchor="t" marL="90000" marR="90000">
+                    <a:lnL>
+                      <a:noFill/>
+                    </a:lnL>
+                    <a:lnR>
+                      <a:noFill/>
+                    </a:lnR>
+                    <a:lnT>
+                      <a:noFill/>
+                    </a:lnT>
+                    <a:lnB>
+                      <a:noFill/>
+                    </a:lnB>
+                    <a:solidFill>
+                      <a:srgbClr val="729fcf"/>
+                    </a:solidFill>
+                  </a:tcPr>
+                </a:tc>
+                <a:tc>
+                  <a:txBody>
+                    <a:bodyPr lIns="90000" rIns="90000" tIns="45000" bIns="45000" anchor="t">
+                      <a:noAutofit/>
+                    </a:bodyPr>
+                    <a:p>
+                      <a:r>
+                        <a:rPr b="0" lang="en-US" sz="1800" spc="-1" strike="noStrike">
+                          <a:latin typeface="Arial"/>
+                        </a:rPr>
+                        <a:t>A bad upgrade</a:t>
+                      </a:r>
+                      <a:endParaRPr b="0" lang="en-US" sz="1800" spc="-1" strike="noStrike">
+                        <a:latin typeface="Arial"/>
+                      </a:endParaRPr>
+                    </a:p>
+                  </a:txBody>
+                  <a:tcPr anchor="t" marL="90000" marR="90000">
+                    <a:lnL>
+                      <a:noFill/>
+                    </a:lnL>
+                    <a:lnR>
+                      <a:noFill/>
+                    </a:lnR>
+                    <a:lnT>
+                      <a:noFill/>
+                    </a:lnT>
+                    <a:lnB>
+                      <a:noFill/>
+                    </a:lnB>
+                    <a:solidFill>
+                      <a:srgbClr val="729fcf"/>
+                    </a:solidFill>
+                  </a:tcPr>
+                </a:tc>
+                <a:tc>
+                  <a:txBody>
+                    <a:bodyPr lIns="90000" rIns="90000" tIns="45000" bIns="45000" anchor="t">
+                      <a:noAutofit/>
+                    </a:bodyPr>
+                    <a:p>
+                      <a:r>
+                        <a:rPr b="0" lang="en-US" sz="1800" spc="-1" strike="noStrike">
+                          <a:latin typeface="Arial"/>
+                        </a:rPr>
+                        <a:t>Same damage</a:t>
+                      </a:r>
+                      <a:endParaRPr b="0" lang="en-US" sz="1800" spc="-1" strike="noStrike">
+                        <a:latin typeface="Arial"/>
+                      </a:endParaRPr>
+                    </a:p>
+                  </a:txBody>
+                  <a:tcPr anchor="t" marL="90000" marR="90000">
+                    <a:lnL>
+                      <a:noFill/>
+                    </a:lnL>
+                    <a:lnR>
+                      <a:noFill/>
+                    </a:lnR>
+                    <a:lnT>
+                      <a:noFill/>
+                    </a:lnT>
+                    <a:lnB>
+                      <a:noFill/>
+                    </a:lnB>
+                    <a:solidFill>
+                      <a:srgbClr val="729fcf"/>
+                    </a:solidFill>
+                  </a:tcPr>
+                </a:tc>
+              </a:tr>
+              <a:tr h="450000">
+                <a:tc>
+                  <a:txBody>
+                    <a:bodyPr lIns="90000" rIns="90000" tIns="45000" bIns="45000" anchor="t">
+                      <a:noAutofit/>
+                    </a:bodyPr>
+                    <a:p>
+                      <a:r>
+                        <a:rPr b="0" lang="en-US" sz="1800" spc="-1" strike="noStrike">
+                          <a:latin typeface="Arial"/>
+                        </a:rPr>
+                        <a:t>The real signers, announced</a:t>
+                      </a:r>
+                      <a:endParaRPr b="0" lang="en-US" sz="1800" spc="-1" strike="noStrike">
+                        <a:latin typeface="Arial"/>
+                      </a:endParaRPr>
+                    </a:p>
+                  </a:txBody>
+                  <a:tcPr anchor="t" marL="90000" marR="90000">
+                    <a:lnL>
+                      <a:noFill/>
+                    </a:lnL>
+                    <a:lnR>
+                      <a:noFill/>
+                    </a:lnR>
+                    <a:lnT>
+                      <a:noFill/>
+                    </a:lnT>
+                    <a:lnB>
+                      <a:noFill/>
+                    </a:lnB>
+                    <a:solidFill>
+                      <a:srgbClr val="729fcf"/>
+                    </a:solidFill>
+                  </a:tcPr>
+                </a:tc>
+                <a:tc>
+                  <a:txBody>
+                    <a:bodyPr lIns="90000" rIns="90000" tIns="45000" bIns="45000" anchor="t">
+                      <a:noAutofit/>
+                    </a:bodyPr>
+                    <a:p>
+                      <a:r>
+                        <a:rPr b="0" lang="en-US" sz="1800" spc="-1" strike="noStrike">
+                          <a:latin typeface="Arial"/>
+                        </a:rPr>
+                        <a:t>Maintenance</a:t>
+                      </a:r>
+                      <a:endParaRPr b="0" lang="en-US" sz="1800" spc="-1" strike="noStrike">
+                        <a:latin typeface="Arial"/>
+                      </a:endParaRPr>
+                    </a:p>
+                  </a:txBody>
+                  <a:tcPr anchor="t" marL="90000" marR="90000">
+                    <a:lnL>
+                      <a:noFill/>
+                    </a:lnL>
+                    <a:lnR>
+                      <a:noFill/>
+                    </a:lnR>
+                    <a:lnT>
+                      <a:noFill/>
+                    </a:lnT>
+                    <a:lnB>
+                      <a:noFill/>
+                    </a:lnB>
+                    <a:solidFill>
+                      <a:srgbClr val="729fcf"/>
+                    </a:solidFill>
+                  </a:tcPr>
+                </a:tc>
+                <a:tc>
+                  <a:txBody>
+                    <a:bodyPr lIns="90000" rIns="90000" tIns="45000" bIns="45000" anchor="t">
+                      <a:noAutofit/>
+                    </a:bodyPr>
+                    <a:p>
+                      <a:r>
+                        <a:rPr b="0" lang="en-US" sz="1800" spc="-1" strike="noStrike">
+                          <a:latin typeface="Arial"/>
+                        </a:rPr>
+                        <a:t>Nothing bad</a:t>
+                      </a:r>
+                      <a:endParaRPr b="0" lang="en-US" sz="1800" spc="-1" strike="noStrike">
+                        <a:latin typeface="Arial"/>
+                      </a:endParaRPr>
+                    </a:p>
+                  </a:txBody>
+                  <a:tcPr anchor="t" marL="90000" marR="90000">
+                    <a:lnL>
+                      <a:noFill/>
+                    </a:lnL>
+                    <a:lnR>
+                      <a:noFill/>
+                    </a:lnR>
+                    <a:lnT>
+                      <a:noFill/>
+                    </a:lnT>
+                    <a:lnB>
+                      <a:noFill/>
+                    </a:lnB>
+                    <a:solidFill>
+                      <a:srgbClr val="729fcf"/>
+                    </a:solidFill>
+                  </a:tcPr>
+                </a:tc>
+              </a:tr>
+            </a:tbl>
+          </a:graphicData>
+        </a:graphic>
+      </p:graphicFrame>
     </p:spTree>
   </p:cSld>
   <mc:AlternateContent>
